--- a/Topic_E/Exam_Practice/TE-L01_Speaking_Workshop_Countries_Nationalities_and_Languages.pptx
+++ b/Topic_E/Exam_Practice/TE-L01_Speaking_Workshop_Countries_Nationalities_and_Languages.pptx
@@ -615,7 +615,11 @@
           <a:lstStyle/>
           <a:p>
             <a:r>
-              <a:rPr lang="en-US" dirty="0"/>
+              <a:rPr lang="ar-SA" dirty="0">
+                <a:latin typeface="Amiri" pitchFamily="2" charset="-78"/>
+                <a:ea typeface="Amiri" pitchFamily="2" charset="-78"/>
+                <a:cs typeface="Amiri" pitchFamily="2" charset="-78"/>
+              </a:rPr>
               <a:t>ROLE PLAY C (Develop) — a radio programme.
 SET-UP IN THE BREAKOUT ROOM: A = examiner (reads the left column ONLY — the questions, in order), B = candidate (sees the task column; Core may use the help column), C = observer (ticks the feedback checklist). 1 minute preparation, about 3 minutes speaking, 1 minute feedback, then rotate.
 Task ! is the unexpected question: in the exam the candidate has not seen it — the examiner should read it without warning.
@@ -707,7 +711,11 @@
           <a:lstStyle/>
           <a:p>
             <a:r>
-              <a:rPr lang="en-US" dirty="0"/>
+              <a:rPr lang="ar-SA" dirty="0">
+                <a:latin typeface="Amiri" pitchFamily="2" charset="-78"/>
+                <a:ea typeface="Amiri" pitchFamily="2" charset="-78"/>
+                <a:cs typeface="Amiri" pitchFamily="2" charset="-78"/>
+              </a:rPr>
               <a:t>ROLE PLAY D (Stretch) — a formal interview.
 SET-UP IN THE BREAKOUT ROOM: A = examiner (reads the left column ONLY — the questions, in order), B = candidate (sees the task column; Core may use the help column), C = observer (ticks the feedback checklist). 1 minute preparation, about 3 minutes speaking, 1 minute feedback, then rotate.
 Task ! is the unexpected question: in the exam the candidate has not seen it — the examiner should read it without warning.
@@ -1243,7 +1251,11 @@
           <a:lstStyle/>
           <a:p>
             <a:r>
-              <a:rPr lang="en-US" dirty="0"/>
+              <a:rPr lang="ar-SA" dirty="0">
+                <a:latin typeface="Amiri" pitchFamily="2" charset="-78"/>
+                <a:ea typeface="Amiri" pitchFamily="2" charset="-78"/>
+                <a:cs typeface="Amiri" pitchFamily="2" charset="-78"/>
+              </a:rPr>
               <a:t>TOPIC CONVERSATION — Core. Examiner asks the questions in order and may add “لِمَاذَا؟ / هَلْ يُمْكِنُ أَنْ تَشْرَحَ أَكْثَرَ؟” to push for more. Candidate aims for one full sentence per question.
 </a:t>
             </a:r>
@@ -1332,7 +1344,11 @@
           <a:lstStyle/>
           <a:p>
             <a:r>
-              <a:rPr lang="en-US" dirty="0"/>
+              <a:rPr lang="ar-SA" dirty="0">
+                <a:latin typeface="Amiri" pitchFamily="2" charset="-78"/>
+                <a:ea typeface="Amiri" pitchFamily="2" charset="-78"/>
+                <a:cs typeface="Amiri" pitchFamily="2" charset="-78"/>
+              </a:rPr>
               <a:t>TOPIC CONVERSATION — Develop. Examiner asks the questions in order and may add “لِمَاذَا؟ / هَلْ يُمْكِنُ أَنْ تَشْرَحَ أَكْثَرَ؟” to push for more. Candidate aims for two or three sentences, with a location, a reason and a time frame.
 </a:t>
             </a:r>
@@ -1421,7 +1437,11 @@
           <a:lstStyle/>
           <a:p>
             <a:r>
-              <a:rPr lang="en-US" dirty="0"/>
+              <a:rPr lang="ar-SA" dirty="0">
+                <a:latin typeface="Amiri" pitchFamily="2" charset="-78"/>
+                <a:ea typeface="Amiri" pitchFamily="2" charset="-78"/>
+                <a:cs typeface="Amiri" pitchFamily="2" charset="-78"/>
+              </a:rPr>
               <a:t>TOPIC CONVERSATION — Stretch. Examiner asks the questions in order and may add “لِمَاذَا؟ / هَلْ يُمْكِنُ أَنْ تَشْرَحَ أَكْثَرَ؟” to push for more. Candidate aims for a developed answer: opinion, balance, concession and a conditional.
 </a:t>
             </a:r>
@@ -1510,7 +1530,11 @@
           <a:lstStyle/>
           <a:p>
             <a:r>
-              <a:rPr lang="en-US" dirty="0"/>
+              <a:rPr lang="ar-SA" dirty="0">
+                <a:latin typeface="Amiri" pitchFamily="2" charset="-78"/>
+                <a:ea typeface="Amiri" pitchFamily="2" charset="-78"/>
+                <a:cs typeface="Amiri" pitchFamily="2" charset="-78"/>
+              </a:rPr>
               <a:t>WELCOME (1 min) — while students join.
 • Greet each student by name as they arrive: السَّلَامُ عَلَيْكُمْ. Take the register (Pastoral Tracker: attendance 0/1).
 • 2-MINUTE CHECK-IN (SEND training): a private chat to any student who seemed unsettled last lesson — “Are you okay today? 👍 / 👎”.
@@ -2224,7 +2248,11 @@
           <a:lstStyle/>
           <a:p>
             <a:r>
-              <a:rPr lang="en-US" dirty="0"/>
+              <a:rPr lang="ar-SA" dirty="0">
+                <a:latin typeface="Amiri" pitchFamily="2" charset="-78"/>
+                <a:ea typeface="Amiri" pitchFamily="2" charset="-78"/>
+                <a:cs typeface="Amiri" pitchFamily="2" charset="-78"/>
+              </a:rPr>
               <a:t>TEACH (3 min). Role play = precise and complete; conversation = develop. Choral repetition of the repair phrases. To a girl: تُعِيدِي.</a:t>
             </a:r>
             <a:endParaRPr lang="en-US" dirty="0"/>
@@ -2312,7 +2340,11 @@
           <a:lstStyle/>
           <a:p>
             <a:r>
-              <a:rPr lang="en-US" dirty="0"/>
+              <a:rPr lang="ar-SA" dirty="0">
+                <a:latin typeface="Amiri" pitchFamily="2" charset="-78"/>
+                <a:ea typeface="Amiri" pitchFamily="2" charset="-78"/>
+                <a:cs typeface="Amiri" pitchFamily="2" charset="-78"/>
+              </a:rPr>
               <a:t>LANGUAGE BANK (2 min) — the nisba: drop al- and the final vowel, add ـِيٌّ (m.), ـِيَّةٌ (f.), ـِيُّونَ (pl.): مِصْرُ → مِصْرِيٌّ · مِصْرِيَّةٌ · مِصْرِيُّونَ. Watch irregular plurals: مَغَارِبَةٌ. Drill: انْطِقْ / قُولِي الجِنْسِيَّةَ لِأُمِّكَ وَأَبِيكَ.</a:t>
             </a:r>
             <a:endParaRPr lang="en-US" dirty="0"/>
@@ -2400,7 +2432,11 @@
           <a:lstStyle/>
           <a:p>
             <a:r>
-              <a:rPr lang="en-US" dirty="0"/>
+              <a:rPr lang="ar-SA" dirty="0">
+                <a:latin typeface="Amiri" pitchFamily="2" charset="-78"/>
+                <a:ea typeface="Amiri" pitchFamily="2" charset="-78"/>
+                <a:cs typeface="Amiri" pitchFamily="2" charset="-78"/>
+              </a:rPr>
               <a:t>LANGUAGE BANK (2 min) — yaqaʿu (m. country) vs taqaʿu (f. country / city): يَقَعُ المَغْرِبُ · تَقَعُ مِصْرُ. Languages are feminine (al-ʿarabiyya) — so "my favourite language" is لُغَتِي المُفَضَّلَةُ.</a:t>
             </a:r>
             <a:endParaRPr lang="en-US" dirty="0"/>
@@ -2576,7 +2612,11 @@
           <a:lstStyle/>
           <a:p>
             <a:r>
-              <a:rPr lang="en-US" dirty="0"/>
+              <a:rPr lang="ar-SA" dirty="0">
+                <a:latin typeface="Amiri" pitchFamily="2" charset="-78"/>
+                <a:ea typeface="Amiri" pitchFamily="2" charset="-78"/>
+                <a:cs typeface="Amiri" pitchFamily="2" charset="-78"/>
+              </a:rPr>
               <a:t>ROLE PLAY A (Core) — an international summer camp.
 SET-UP IN THE BREAKOUT ROOM: A = examiner (reads the left column ONLY — the questions, in order), B = candidate (sees the task column; Core may use the help column), C = observer (ticks the feedback checklist). 1 minute preparation, about 3 minutes speaking, 1 minute feedback, then rotate.
 Task ! is the unexpected question: in the exam the candidate has not seen it — the examiner should read it without warning.
@@ -2668,7 +2708,11 @@
           <a:lstStyle/>
           <a:p>
             <a:r>
-              <a:rPr lang="en-US" dirty="0"/>
+              <a:rPr lang="ar-SA" dirty="0">
+                <a:latin typeface="Amiri" pitchFamily="2" charset="-78"/>
+                <a:ea typeface="Amiri" pitchFamily="2" charset="-78"/>
+                <a:cs typeface="Amiri" pitchFamily="2" charset="-78"/>
+              </a:rPr>
               <a:t>ROLE PLAY B (Core+) — the first day at school.
 SET-UP IN THE BREAKOUT ROOM: A = examiner (reads the left column ONLY — the questions, in order), B = candidate (sees the task column; Core may use the help column), C = observer (ticks the feedback checklist). 1 minute preparation, about 3 minutes speaking, 1 minute feedback, then rotate.
 Task ! is the unexpected question: in the exam the candidate has not seen it — the examiner should read it without warning.
@@ -3156,6 +3200,7 @@
                   <a:srgbClr val="D4AF37"/>
                 </a:solidFill>
                 <a:latin typeface="Amiri" pitchFamily="2" charset="-78"/>
+                <a:ea typeface="Amiri" pitchFamily="2" charset="-78"/>
                 <a:cs typeface="Amiri" pitchFamily="2" charset="-78"/>
               </a:rPr>
               <a:t>م</a:t>
@@ -3362,6 +3407,7 @@
                   <a:srgbClr val="D4AF37"/>
                 </a:solidFill>
                 <a:latin typeface="Amiri" pitchFamily="2" charset="-78"/>
+                <a:ea typeface="Amiri" pitchFamily="2" charset="-78"/>
                 <a:cs typeface="Amiri" pitchFamily="2" charset="-78"/>
               </a:rPr>
               <a:t>وَرْشَةُ التَّحَدُّثِ — البُلْدَانُ وَالجِنْسِيَّاتُ وَاللُّغَاتُ</a:t>
@@ -3413,6 +3459,7 @@
                   <a:srgbClr val="C6D2E6"/>
                 </a:solidFill>
                 <a:latin typeface="Amiri" pitchFamily="2" charset="-78"/>
+                <a:ea typeface="Amiri" pitchFamily="2" charset="-78"/>
                 <a:cs typeface="Amiri" pitchFamily="2" charset="-78"/>
               </a:rPr>
               <a:t>فِي شَمَالِ</a:t>
@@ -3439,6 +3486,7 @@
                   <a:srgbClr val="C6D2E6"/>
                 </a:solidFill>
                 <a:latin typeface="Amiri" pitchFamily="2" charset="-78"/>
+                <a:ea typeface="Amiri" pitchFamily="2" charset="-78"/>
                 <a:cs typeface="Amiri" pitchFamily="2" charset="-78"/>
               </a:rPr>
               <a:t>بَيْنَ</a:t>
@@ -3465,6 +3513,7 @@
                   <a:srgbClr val="C6D2E6"/>
                 </a:solidFill>
                 <a:latin typeface="Amiri" pitchFamily="2" charset="-78"/>
+                <a:ea typeface="Amiri" pitchFamily="2" charset="-78"/>
                 <a:cs typeface="Amiri" pitchFamily="2" charset="-78"/>
               </a:rPr>
               <a:t>قُرْبَ</a:t>
@@ -3897,6 +3946,7 @@
                   <a:srgbClr val="D4AF37"/>
                 </a:solidFill>
                 <a:latin typeface="Amiri" pitchFamily="2" charset="-78"/>
+                <a:ea typeface="Amiri" pitchFamily="2" charset="-78"/>
                 <a:cs typeface="Amiri" pitchFamily="2" charset="-78"/>
               </a:rPr>
               <a:t>م</a:t>
@@ -4217,6 +4267,7 @@
                   <a:srgbClr val="8A6D1E"/>
                 </a:solidFill>
                 <a:latin typeface="Amiri" pitchFamily="2" charset="-78"/>
+                <a:ea typeface="Amiri" pitchFamily="2" charset="-78"/>
                 <a:cs typeface="Amiri" pitchFamily="2" charset="-78"/>
               </a:rPr>
               <a:t>أُسَرٌ مُتَعَدِّدَةُ اللُّغَاتِ</a:t>
@@ -4497,6 +4548,7 @@
                   <a:srgbClr val="1B3B6F"/>
                 </a:solidFill>
                 <a:latin typeface="Amiri" pitchFamily="2" charset="-78"/>
+                <a:ea typeface="Amiri" pitchFamily="2" charset="-78"/>
                 <a:cs typeface="Amiri" pitchFamily="2" charset="-78"/>
               </a:rPr>
               <a:t>أَبِي … وَأُمِّي … أَمَّا أَنَا فَوُلِدْتُ …</a:t>
@@ -4573,6 +4625,7 @@
                   <a:srgbClr val="1B3B6F"/>
                 </a:solidFill>
                 <a:latin typeface="Amiri" pitchFamily="2" charset="-78"/>
+                <a:ea typeface="Amiri" pitchFamily="2" charset="-78"/>
                 <a:cs typeface="Amiri" pitchFamily="2" charset="-78"/>
               </a:rPr>
               <a:t>حَدِّثْنَا عَنْ أَصْلِ أُسْرَتِكَ.</a:t>
@@ -4676,6 +4729,7 @@
                   <a:srgbClr val="1B3B6F"/>
                 </a:solidFill>
                 <a:latin typeface="Amiri" pitchFamily="2" charset="-78"/>
+                <a:ea typeface="Amiri" pitchFamily="2" charset="-78"/>
                 <a:cs typeface="Amiri" pitchFamily="2" charset="-78"/>
               </a:rPr>
               <a:t>يَقَعُ … بَيْنَ … وَ… عَلَى …</a:t>
@@ -4752,6 +4806,7 @@
                   <a:srgbClr val="1B3B6F"/>
                 </a:solidFill>
                 <a:latin typeface="Amiri" pitchFamily="2" charset="-78"/>
+                <a:ea typeface="Amiri" pitchFamily="2" charset="-78"/>
                 <a:cs typeface="Amiri" pitchFamily="2" charset="-78"/>
               </a:rPr>
               <a:t>وَأَيْنَ يَقَعُ لُبْنَانُ بِالضَّبْطِ؟</a:t>
@@ -4855,6 +4910,7 @@
                   <a:srgbClr val="1B3B6F"/>
                 </a:solidFill>
                 <a:latin typeface="Amiri" pitchFamily="2" charset="-78"/>
+                <a:ea typeface="Amiri" pitchFamily="2" charset="-78"/>
                 <a:cs typeface="Amiri" pitchFamily="2" charset="-78"/>
               </a:rPr>
               <a:t>نَتَكَلَّمُ … ؛ فَمَعَ جَدَّتِي … وَمَعَ …</a:t>
@@ -4931,6 +4987,7 @@
                   <a:srgbClr val="1B3B6F"/>
                 </a:solidFill>
                 <a:latin typeface="Amiri" pitchFamily="2" charset="-78"/>
+                <a:ea typeface="Amiri" pitchFamily="2" charset="-78"/>
                 <a:cs typeface="Amiri" pitchFamily="2" charset="-78"/>
               </a:rPr>
               <a:t>كَمْ لُغَةً تَتَكَلَّمُونَ فِي البَيْتِ؟</a:t>
@@ -5034,6 +5091,7 @@
                   <a:srgbClr val="1B3B6F"/>
                 </a:solidFill>
                 <a:latin typeface="Amiri" pitchFamily="2" charset="-78"/>
+                <a:ea typeface="Amiri" pitchFamily="2" charset="-78"/>
                 <a:cs typeface="Amiri" pitchFamily="2" charset="-78"/>
               </a:rPr>
               <a:t>كُنْتُ … أَمَّا الآنَ فَأَنْتَقِلُ …</a:t>
@@ -5110,6 +5168,7 @@
                   <a:srgbClr val="1B3B6F"/>
                 </a:solidFill>
                 <a:latin typeface="Amiri" pitchFamily="2" charset="-78"/>
+                <a:ea typeface="Amiri" pitchFamily="2" charset="-78"/>
                 <a:cs typeface="Amiri" pitchFamily="2" charset="-78"/>
               </a:rPr>
               <a:t>هَلْ كَانَ ذٰلِكَ صَعْبًا عِنْدَمَا كُنْتَ صَغِيرًا؟</a:t>
@@ -5213,6 +5272,7 @@
                   <a:srgbClr val="1B3B6F"/>
                 </a:solidFill>
                 <a:latin typeface="Amiri" pitchFamily="2" charset="-78"/>
+                <a:ea typeface="Amiri" pitchFamily="2" charset="-78"/>
                 <a:cs typeface="Amiri" pitchFamily="2" charset="-78"/>
               </a:rPr>
               <a:t>نَعَمْ، سَأُعَلِّمُهُمْ … لِأَنَّ …</a:t>
@@ -5289,6 +5349,7 @@
                   <a:srgbClr val="1B3B6F"/>
                 </a:solidFill>
                 <a:latin typeface="Amiri" pitchFamily="2" charset="-78"/>
+                <a:ea typeface="Amiri" pitchFamily="2" charset="-78"/>
                 <a:cs typeface="Amiri" pitchFamily="2" charset="-78"/>
               </a:rPr>
               <a:t>هَلْ سَتُعَلِّمُ أَوْلَادَكَ هٰذِهِ اللُّغَاتِ؟</a:t>
@@ -5498,6 +5559,7 @@
                   <a:srgbClr val="D4AF37"/>
                 </a:solidFill>
                 <a:latin typeface="Amiri" pitchFamily="2" charset="-78"/>
+                <a:ea typeface="Amiri" pitchFamily="2" charset="-78"/>
                 <a:cs typeface="Amiri" pitchFamily="2" charset="-78"/>
               </a:rPr>
               <a:t>م</a:t>
@@ -5818,6 +5880,7 @@
                   <a:srgbClr val="8A6D1E"/>
                 </a:solidFill>
                 <a:latin typeface="Amiri" pitchFamily="2" charset="-78"/>
+                <a:ea typeface="Amiri" pitchFamily="2" charset="-78"/>
                 <a:cs typeface="Amiri" pitchFamily="2" charset="-78"/>
               </a:rPr>
               <a:t>مُقَابَلَةُ سَفِيرِ الشَّبَابِ</a:t>
@@ -6098,6 +6161,7 @@
                   <a:srgbClr val="1B3B6F"/>
                 </a:solidFill>
                 <a:latin typeface="Amiri" pitchFamily="2" charset="-78"/>
+                <a:ea typeface="Amiri" pitchFamily="2" charset="-78"/>
                 <a:cs typeface="Amiri" pitchFamily="2" charset="-78"/>
               </a:rPr>
               <a:t>يَسُرُّنِي أَنْ … وُلِدْتُ … غَيْرَ أَنَّ …</a:t>
@@ -6174,6 +6238,7 @@
                   <a:srgbClr val="1B3B6F"/>
                 </a:solidFill>
                 <a:latin typeface="Amiri" pitchFamily="2" charset="-78"/>
+                <a:ea typeface="Amiri" pitchFamily="2" charset="-78"/>
                 <a:cs typeface="Amiri" pitchFamily="2" charset="-78"/>
               </a:rPr>
               <a:t>عَرِّفْنَا بِنَفْسِكَ وَبِهُوِيَّتِكَ.</a:t>
@@ -6277,6 +6342,7 @@
                   <a:srgbClr val="1B3B6F"/>
                 </a:solidFill>
                 <a:latin typeface="Amiri" pitchFamily="2" charset="-78"/>
+                <a:ea typeface="Amiri" pitchFamily="2" charset="-78"/>
                 <a:cs typeface="Amiri" pitchFamily="2" charset="-78"/>
               </a:rPr>
               <a:t>أَرَى أَنَّ … أَوَّلًا … بِالإِضَافَةِ إِلَى ذٰلِكَ …</a:t>
@@ -6353,6 +6419,7 @@
                   <a:srgbClr val="1B3B6F"/>
                 </a:solidFill>
                 <a:latin typeface="Amiri" pitchFamily="2" charset="-78"/>
+                <a:ea typeface="Amiri" pitchFamily="2" charset="-78"/>
                 <a:cs typeface="Amiri" pitchFamily="2" charset="-78"/>
               </a:rPr>
               <a:t>مَا قِيمَةُ اللُّغَاتِ فِي رَأْيِكَ؟</a:t>
@@ -6456,6 +6523,7 @@
                   <a:srgbClr val="1B3B6F"/>
                 </a:solidFill>
                 <a:latin typeface="Amiri" pitchFamily="2" charset="-78"/>
+                <a:ea typeface="Amiri" pitchFamily="2" charset="-78"/>
                 <a:cs typeface="Amiri" pitchFamily="2" charset="-78"/>
               </a:rPr>
               <a:t>عِنْدَمَا … كَانَ … فَقَدَّمْتُ …</a:t>
@@ -6532,6 +6600,7 @@
                   <a:srgbClr val="1B3B6F"/>
                 </a:solidFill>
                 <a:latin typeface="Amiri" pitchFamily="2" charset="-78"/>
+                <a:ea typeface="Amiri" pitchFamily="2" charset="-78"/>
                 <a:cs typeface="Amiri" pitchFamily="2" charset="-78"/>
               </a:rPr>
               <a:t>هَلْ وَاجَهْتَ صُعُوبَةً بِسَبَبِ أَصْلِكَ؟</a:t>
@@ -6635,6 +6704,7 @@
                   <a:srgbClr val="1B3B6F"/>
                 </a:solidFill>
                 <a:latin typeface="Amiri" pitchFamily="2" charset="-78"/>
+                <a:ea typeface="Amiri" pitchFamily="2" charset="-78"/>
                 <a:cs typeface="Amiri" pitchFamily="2" charset="-78"/>
               </a:rPr>
               <a:t>صَحِيحٌ أَنَّ … غَيْرَ أَنَّ … لِذٰلِكَ …</a:t>
@@ -6711,6 +6781,7 @@
                   <a:srgbClr val="1B3B6F"/>
                 </a:solidFill>
                 <a:latin typeface="Amiri" pitchFamily="2" charset="-78"/>
+                <a:ea typeface="Amiri" pitchFamily="2" charset="-78"/>
                 <a:cs typeface="Amiri" pitchFamily="2" charset="-78"/>
               </a:rPr>
               <a:t>أَلَا تَخْشَى أَنْ تَضِيعَ لُغَتُكَ الأُمُّ؟</a:t>
@@ -6814,6 +6885,7 @@
                   <a:srgbClr val="1B3B6F"/>
                 </a:solidFill>
                 <a:latin typeface="Amiri" pitchFamily="2" charset="-78"/>
+                <a:ea typeface="Amiri" pitchFamily="2" charset="-78"/>
                 <a:cs typeface="Amiri" pitchFamily="2" charset="-78"/>
               </a:rPr>
               <a:t>لَوْ مَثَّلْتُ …، لَقُلْتُ إِنَّ …</a:t>
@@ -6890,6 +6962,7 @@
                   <a:srgbClr val="1B3B6F"/>
                 </a:solidFill>
                 <a:latin typeface="Amiri" pitchFamily="2" charset="-78"/>
+                <a:ea typeface="Amiri" pitchFamily="2" charset="-78"/>
                 <a:cs typeface="Amiri" pitchFamily="2" charset="-78"/>
               </a:rPr>
               <a:t>لَوْ مَثَّلْتَ بَلَدَكَ فِي مُؤْتَمَرٍ دُوَلِيٍّ، مَاذَا تَقُولُ؟</a:t>
@@ -7099,6 +7172,7 @@
                   <a:srgbClr val="D4AF37"/>
                 </a:solidFill>
                 <a:latin typeface="Amiri" pitchFamily="2" charset="-78"/>
+                <a:ea typeface="Amiri" pitchFamily="2" charset="-78"/>
                 <a:cs typeface="Amiri" pitchFamily="2" charset="-78"/>
               </a:rPr>
               <a:t>م</a:t>
@@ -7419,6 +7493,7 @@
                   <a:srgbClr val="8A6D1E"/>
                 </a:solidFill>
                 <a:latin typeface="Amiri" pitchFamily="2" charset="-78"/>
+                <a:ea typeface="Amiri" pitchFamily="2" charset="-78"/>
                 <a:cs typeface="Amiri" pitchFamily="2" charset="-78"/>
               </a:rPr>
               <a:t>وَرَقَةُ المُلَاحِظِ</a:t>
@@ -8889,6 +8964,7 @@
                   <a:srgbClr val="D4AF37"/>
                 </a:solidFill>
                 <a:latin typeface="Amiri" pitchFamily="2" charset="-78"/>
+                <a:ea typeface="Amiri" pitchFamily="2" charset="-78"/>
                 <a:cs typeface="Amiri" pitchFamily="2" charset="-78"/>
               </a:rPr>
               <a:t>م</a:t>
@@ -9209,6 +9285,7 @@
                   <a:srgbClr val="8A6D1E"/>
                 </a:solidFill>
                 <a:latin typeface="Amiri" pitchFamily="2" charset="-78"/>
+                <a:ea typeface="Amiri" pitchFamily="2" charset="-78"/>
                 <a:cs typeface="Amiri" pitchFamily="2" charset="-78"/>
               </a:rPr>
               <a:t>نَمُوذَجُ الإِجَابَةِ</a:t>
@@ -9451,6 +9528,7 @@
                   <a:srgbClr val="1B3B6F"/>
                 </a:solidFill>
                 <a:latin typeface="Amiri" pitchFamily="2" charset="-78"/>
+                <a:ea typeface="Amiri" pitchFamily="2" charset="-78"/>
                 <a:cs typeface="Amiri" pitchFamily="2" charset="-78"/>
               </a:rPr>
               <a:t>اسْمِي عُمَرُ، وَأَنَا مِنْ بَرِيطَانْيَا.</a:t>
@@ -9527,6 +9605,7 @@
                   <a:srgbClr val="1B3B6F"/>
                 </a:solidFill>
                 <a:latin typeface="Amiri" pitchFamily="2" charset="-78"/>
+                <a:ea typeface="Amiri" pitchFamily="2" charset="-78"/>
                 <a:cs typeface="Amiri" pitchFamily="2" charset="-78"/>
               </a:rPr>
               <a:t>أَهْلًا وَسَهْلًا! مَا اسْمُكَ؟ وَمِنْ أَيْنَ أَنْتَ؟</a:t>
@@ -9630,6 +9709,7 @@
                   <a:srgbClr val="1B3B6F"/>
                 </a:solidFill>
                 <a:latin typeface="Amiri" pitchFamily="2" charset="-78"/>
+                <a:ea typeface="Amiri" pitchFamily="2" charset="-78"/>
                 <a:cs typeface="Amiri" pitchFamily="2" charset="-78"/>
               </a:rPr>
               <a:t>أَنَا بَرِيطَانِيٌّ، وَأَصْلِي مِنَ المَغْرِبِ.</a:t>
@@ -9706,6 +9786,7 @@
                   <a:srgbClr val="1B3B6F"/>
                 </a:solidFill>
                 <a:latin typeface="Amiri" pitchFamily="2" charset="-78"/>
+                <a:ea typeface="Amiri" pitchFamily="2" charset="-78"/>
                 <a:cs typeface="Amiri" pitchFamily="2" charset="-78"/>
               </a:rPr>
               <a:t>مَا جِنْسِيَّتُكَ؟</a:t>
@@ -9809,6 +9890,7 @@
                   <a:srgbClr val="1B3B6F"/>
                 </a:solidFill>
                 <a:latin typeface="Amiri" pitchFamily="2" charset="-78"/>
+                <a:ea typeface="Amiri" pitchFamily="2" charset="-78"/>
                 <a:cs typeface="Amiri" pitchFamily="2" charset="-78"/>
               </a:rPr>
               <a:t>أَتَكَلَّمُ الإِنْجْلِيزِيَّةَ وَالعَرَبِيَّةَ.</a:t>
@@ -9885,6 +9967,7 @@
                   <a:srgbClr val="1B3B6F"/>
                 </a:solidFill>
                 <a:latin typeface="Amiri" pitchFamily="2" charset="-78"/>
+                <a:ea typeface="Amiri" pitchFamily="2" charset="-78"/>
                 <a:cs typeface="Amiri" pitchFamily="2" charset="-78"/>
               </a:rPr>
               <a:t>مَا اللُّغَاتُ الَّتِي تَتَكَلَّمُهَا؟</a:t>
@@ -9988,6 +10071,7 @@
                   <a:srgbClr val="1B3B6F"/>
                 </a:solidFill>
                 <a:latin typeface="Amiri" pitchFamily="2" charset="-78"/>
+                <a:ea typeface="Amiri" pitchFamily="2" charset="-78"/>
                 <a:cs typeface="Amiri" pitchFamily="2" charset="-78"/>
               </a:rPr>
               <a:t>مِنْ أَيْنَ أَكْثَرُ الطُّلَّابِ؟</a:t>
@@ -10064,6 +10148,7 @@
                   <a:srgbClr val="1B3B6F"/>
                 </a:solidFill>
                 <a:latin typeface="Amiri" pitchFamily="2" charset="-78"/>
+                <a:ea typeface="Amiri" pitchFamily="2" charset="-78"/>
                 <a:cs typeface="Amiri" pitchFamily="2" charset="-78"/>
               </a:rPr>
               <a:t>مُمْتَازٌ. عِنْدَنَا طُلَّابٌ مِنْ عِشْرِينَ بَلَدًا.</a:t>
@@ -10167,6 +10252,7 @@
                   <a:srgbClr val="1B3B6F"/>
                 </a:solidFill>
                 <a:latin typeface="Amiri" pitchFamily="2" charset="-78"/>
+                <a:ea typeface="Amiri" pitchFamily="2" charset="-78"/>
                 <a:cs typeface="Amiri" pitchFamily="2" charset="-78"/>
               </a:rPr>
               <a:t>يَقَعُ المَغْرِبُ فِي شَمَالِ إِفْرِيقْيَا.</a:t>
@@ -10243,6 +10329,7 @@
                   <a:srgbClr val="1B3B6F"/>
                 </a:solidFill>
                 <a:latin typeface="Amiri" pitchFamily="2" charset="-78"/>
+                <a:ea typeface="Amiri" pitchFamily="2" charset="-78"/>
                 <a:cs typeface="Amiri" pitchFamily="2" charset="-78"/>
               </a:rPr>
               <a:t>مِنْ فَرَنْسَا وَمِصْرَ. أَيْنَ يَقَعُ المَغْرِبُ؟</a:t>
@@ -10452,6 +10539,7 @@
                   <a:srgbClr val="D4AF37"/>
                 </a:solidFill>
                 <a:latin typeface="Amiri" pitchFamily="2" charset="-78"/>
+                <a:ea typeface="Amiri" pitchFamily="2" charset="-78"/>
                 <a:cs typeface="Amiri" pitchFamily="2" charset="-78"/>
               </a:rPr>
               <a:t>م</a:t>
@@ -10772,6 +10860,7 @@
                   <a:srgbClr val="8A6D1E"/>
                 </a:solidFill>
                 <a:latin typeface="Amiri" pitchFamily="2" charset="-78"/>
+                <a:ea typeface="Amiri" pitchFamily="2" charset="-78"/>
                 <a:cs typeface="Amiri" pitchFamily="2" charset="-78"/>
               </a:rPr>
               <a:t>نَمُوذَجُ الإِجَابَةِ</a:t>
@@ -11014,6 +11103,7 @@
                   <a:srgbClr val="1B3B6F"/>
                 </a:solidFill>
                 <a:latin typeface="Amiri" pitchFamily="2" charset="-78"/>
+                <a:ea typeface="Amiri" pitchFamily="2" charset="-78"/>
                 <a:cs typeface="Amiri" pitchFamily="2" charset="-78"/>
               </a:rPr>
               <a:t>أَنَا بَرِيطَانِيٌّ، لٰكِنَّ أَصْلَ أُسْرَتِي مِنَ السُّودَانِ.</a:t>
@@ -11090,6 +11180,7 @@
                   <a:srgbClr val="1B3B6F"/>
                 </a:solidFill>
                 <a:latin typeface="Amiri" pitchFamily="2" charset="-78"/>
+                <a:ea typeface="Amiri" pitchFamily="2" charset="-78"/>
                 <a:cs typeface="Amiri" pitchFamily="2" charset="-78"/>
               </a:rPr>
               <a:t>مَرْحَبًا، أَنَا جَدِيدٌ هُنَا. هَلْ أَنْتَ إِنْجْلِيزِيٌّ؟</a:t>
@@ -11193,6 +11284,7 @@
                   <a:srgbClr val="1B3B6F"/>
                 </a:solidFill>
                 <a:latin typeface="Amiri" pitchFamily="2" charset="-78"/>
+                <a:ea typeface="Amiri" pitchFamily="2" charset="-78"/>
                 <a:cs typeface="Amiri" pitchFamily="2" charset="-78"/>
               </a:rPr>
               <a:t>تَقَعُ السُّودَانُ فِي إِفْرِيقْيَا، جَنُوبَ مِصْرَ.</a:t>
@@ -11269,6 +11361,7 @@
                   <a:srgbClr val="1B3B6F"/>
                 </a:solidFill>
                 <a:latin typeface="Amiri" pitchFamily="2" charset="-78"/>
+                <a:ea typeface="Amiri" pitchFamily="2" charset="-78"/>
                 <a:cs typeface="Amiri" pitchFamily="2" charset="-78"/>
               </a:rPr>
               <a:t>أَيْنَ تَقَعُ السُّودَانُ؟</a:t>
@@ -11372,6 +11465,7 @@
                   <a:srgbClr val="1B3B6F"/>
                 </a:solidFill>
                 <a:latin typeface="Amiri" pitchFamily="2" charset="-78"/>
+                <a:ea typeface="Amiri" pitchFamily="2" charset="-78"/>
                 <a:cs typeface="Amiri" pitchFamily="2" charset="-78"/>
               </a:rPr>
               <a:t>أَتَكَلَّمُ العَرَبِيَّةَ مَعَ وَالِدَيَّ، وَالإِنْجْلِيزِيَّةَ مَعَ إِخْوَتِي.</a:t>
@@ -11448,6 +11542,7 @@
                   <a:srgbClr val="1B3B6F"/>
                 </a:solidFill>
                 <a:latin typeface="Amiri" pitchFamily="2" charset="-78"/>
+                <a:ea typeface="Amiri" pitchFamily="2" charset="-78"/>
                 <a:cs typeface="Amiri" pitchFamily="2" charset="-78"/>
               </a:rPr>
               <a:t>مَا اللُّغَةُ الَّتِي تَتَكَلَّمُهَا فِي البَيْتِ؟</a:t>
@@ -11551,6 +11646,7 @@
                   <a:srgbClr val="1B3B6F"/>
                 </a:solidFill>
                 <a:latin typeface="Amiri" pitchFamily="2" charset="-78"/>
+                <a:ea typeface="Amiri" pitchFamily="2" charset="-78"/>
                 <a:cs typeface="Amiri" pitchFamily="2" charset="-78"/>
               </a:rPr>
               <a:t>مَا عَاصِمَةُ إِيطَالْيَا؟ وَهَلْ تَتَكَلَّمُ الإِنْجْلِيزِيَّةَ جَيِّدًا؟</a:t>
@@ -11627,6 +11723,7 @@
                   <a:srgbClr val="1B3B6F"/>
                 </a:solidFill>
                 <a:latin typeface="Amiri" pitchFamily="2" charset="-78"/>
+                <a:ea typeface="Amiri" pitchFamily="2" charset="-78"/>
                 <a:cs typeface="Amiri" pitchFamily="2" charset="-78"/>
               </a:rPr>
               <a:t>أَنَا مِنْ إِيطَالْيَا.</a:t>
@@ -11730,6 +11827,7 @@
                   <a:srgbClr val="1B3B6F"/>
                 </a:solidFill>
                 <a:latin typeface="Amiri" pitchFamily="2" charset="-78"/>
+                <a:ea typeface="Amiri" pitchFamily="2" charset="-78"/>
                 <a:cs typeface="Amiri" pitchFamily="2" charset="-78"/>
               </a:rPr>
               <a:t>أُرِيدُ أَنْ أَزُورَ اليَابَانَ، لِأَنَّ ثَقَافَتَهَا مُخْتَلِفَةٌ جِدًّا.</a:t>
@@ -11806,6 +11904,7 @@
                   <a:srgbClr val="1B3B6F"/>
                 </a:solidFill>
                 <a:latin typeface="Amiri" pitchFamily="2" charset="-78"/>
+                <a:ea typeface="Amiri" pitchFamily="2" charset="-78"/>
                 <a:cs typeface="Amiri" pitchFamily="2" charset="-78"/>
               </a:rPr>
               <a:t>رُومَا. أَيُّ بَلَدٍ تُرِيدُ أَنْ تَزُورَ؟</a:t>
@@ -12015,6 +12114,7 @@
                   <a:srgbClr val="D4AF37"/>
                 </a:solidFill>
                 <a:latin typeface="Amiri" pitchFamily="2" charset="-78"/>
+                <a:ea typeface="Amiri" pitchFamily="2" charset="-78"/>
                 <a:cs typeface="Amiri" pitchFamily="2" charset="-78"/>
               </a:rPr>
               <a:t>م</a:t>
@@ -12335,6 +12435,7 @@
                   <a:srgbClr val="8A6D1E"/>
                 </a:solidFill>
                 <a:latin typeface="Amiri" pitchFamily="2" charset="-78"/>
+                <a:ea typeface="Amiri" pitchFamily="2" charset="-78"/>
                 <a:cs typeface="Amiri" pitchFamily="2" charset="-78"/>
               </a:rPr>
               <a:t>نَمُوذَجُ الإِجَابَةِ</a:t>
@@ -12577,6 +12678,7 @@
                   <a:srgbClr val="1B3B6F"/>
                 </a:solidFill>
                 <a:latin typeface="Amiri" pitchFamily="2" charset="-78"/>
+                <a:ea typeface="Amiri" pitchFamily="2" charset="-78"/>
                 <a:cs typeface="Amiri" pitchFamily="2" charset="-78"/>
               </a:rPr>
               <a:t>أَبِي مِصْرِيٌّ، وَأُمِّي لُبْنَانِيَّةٌ، أَمَّا أَنَا فَوُلِدْتُ فِي لَنْدَنَ، وَأَحْمِلُ الجِنْسِيَّةَ البَرِيطَانِيَّةَ.</a:t>
@@ -12653,6 +12755,7 @@
                   <a:srgbClr val="1B3B6F"/>
                 </a:solidFill>
                 <a:latin typeface="Amiri" pitchFamily="2" charset="-78"/>
+                <a:ea typeface="Amiri" pitchFamily="2" charset="-78"/>
                 <a:cs typeface="Amiri" pitchFamily="2" charset="-78"/>
               </a:rPr>
               <a:t>حَدِّثْنَا عَنْ أَصْلِ أُسْرَتِكَ.</a:t>
@@ -12756,6 +12859,7 @@
                   <a:srgbClr val="1B3B6F"/>
                 </a:solidFill>
                 <a:latin typeface="Amiri" pitchFamily="2" charset="-78"/>
+                <a:ea typeface="Amiri" pitchFamily="2" charset="-78"/>
                 <a:cs typeface="Amiri" pitchFamily="2" charset="-78"/>
               </a:rPr>
               <a:t>يَقَعُ لُبْنَانُ فِي غَرْبِ آسْيَا، بَيْنَ سُورِيَا وَفِلَسْطِينَ، عَلَى سَاحِلِ البَحْرِ الأَبْيَضِ المُتَوَسِّطِ.</a:t>
@@ -12832,6 +12936,7 @@
                   <a:srgbClr val="1B3B6F"/>
                 </a:solidFill>
                 <a:latin typeface="Amiri" pitchFamily="2" charset="-78"/>
+                <a:ea typeface="Amiri" pitchFamily="2" charset="-78"/>
                 <a:cs typeface="Amiri" pitchFamily="2" charset="-78"/>
               </a:rPr>
               <a:t>وَأَيْنَ يَقَعُ لُبْنَانُ بِالضَّبْطِ؟</a:t>
@@ -12935,6 +13040,7 @@
                   <a:srgbClr val="1B3B6F"/>
                 </a:solidFill>
                 <a:latin typeface="Amiri" pitchFamily="2" charset="-78"/>
+                <a:ea typeface="Amiri" pitchFamily="2" charset="-78"/>
                 <a:cs typeface="Amiri" pitchFamily="2" charset="-78"/>
               </a:rPr>
               <a:t>نَتَكَلَّمُ ثَلَاثَ لُغَاتٍ؛ فَمَعَ جَدَّتِي نَتَكَلَّمُ العَرَبِيَّةَ، وَمَعَ خَالَتِي الفَرَنْسِيَّةَ، وَبَيْنَنَا الإِنْجْلِيزِيَّةَ.</a:t>
@@ -13011,6 +13117,7 @@
                   <a:srgbClr val="1B3B6F"/>
                 </a:solidFill>
                 <a:latin typeface="Amiri" pitchFamily="2" charset="-78"/>
+                <a:ea typeface="Amiri" pitchFamily="2" charset="-78"/>
                 <a:cs typeface="Amiri" pitchFamily="2" charset="-78"/>
               </a:rPr>
               <a:t>كَمْ لُغَةً تَتَكَلَّمُونَ فِي البَيْتِ؟</a:t>
@@ -13114,6 +13221,7 @@
                   <a:srgbClr val="1B3B6F"/>
                 </a:solidFill>
                 <a:latin typeface="Amiri" pitchFamily="2" charset="-78"/>
+                <a:ea typeface="Amiri" pitchFamily="2" charset="-78"/>
                 <a:cs typeface="Amiri" pitchFamily="2" charset="-78"/>
               </a:rPr>
               <a:t>نَعَمْ، كُنْتُ أَخْلِطُ بَيْنَ اللُّغَاتِ، أَمَّا الآنَ فَأَنْتَقِلُ مِنْ لُغَةٍ إِلَى أُخْرَى بِسُهُولَةٍ.</a:t>
@@ -13190,6 +13298,7 @@
                   <a:srgbClr val="1B3B6F"/>
                 </a:solidFill>
                 <a:latin typeface="Amiri" pitchFamily="2" charset="-78"/>
+                <a:ea typeface="Amiri" pitchFamily="2" charset="-78"/>
                 <a:cs typeface="Amiri" pitchFamily="2" charset="-78"/>
               </a:rPr>
               <a:t>هَلْ كَانَ ذٰلِكَ صَعْبًا عِنْدَمَا كُنْتَ صَغِيرًا؟</a:t>
@@ -13293,6 +13402,7 @@
                   <a:srgbClr val="1B3B6F"/>
                 </a:solidFill>
                 <a:latin typeface="Amiri" pitchFamily="2" charset="-78"/>
+                <a:ea typeface="Amiri" pitchFamily="2" charset="-78"/>
                 <a:cs typeface="Amiri" pitchFamily="2" charset="-78"/>
               </a:rPr>
               <a:t>نَعَمْ، سَأُعَلِّمُهُمُ العَرَبِيَّةَ أَوَّلًا، لِأَنَّهَا تَرْبِطُهُمْ بِدِينِهِمْ وَأَجْدَادِهِمْ.</a:t>
@@ -13369,6 +13479,7 @@
                   <a:srgbClr val="1B3B6F"/>
                 </a:solidFill>
                 <a:latin typeface="Amiri" pitchFamily="2" charset="-78"/>
+                <a:ea typeface="Amiri" pitchFamily="2" charset="-78"/>
                 <a:cs typeface="Amiri" pitchFamily="2" charset="-78"/>
               </a:rPr>
               <a:t>هَلْ سَتُعَلِّمُ أَوْلَادَكَ هٰذِهِ اللُّغَاتِ؟</a:t>
@@ -13578,6 +13689,7 @@
                   <a:srgbClr val="D4AF37"/>
                 </a:solidFill>
                 <a:latin typeface="Amiri" pitchFamily="2" charset="-78"/>
+                <a:ea typeface="Amiri" pitchFamily="2" charset="-78"/>
                 <a:cs typeface="Amiri" pitchFamily="2" charset="-78"/>
               </a:rPr>
               <a:t>م</a:t>
@@ -13898,6 +14010,7 @@
                   <a:srgbClr val="8A6D1E"/>
                 </a:solidFill>
                 <a:latin typeface="Amiri" pitchFamily="2" charset="-78"/>
+                <a:ea typeface="Amiri" pitchFamily="2" charset="-78"/>
                 <a:cs typeface="Amiri" pitchFamily="2" charset="-78"/>
               </a:rPr>
               <a:t>نَمُوذَجُ الإِجَابَةِ</a:t>
@@ -14140,6 +14253,7 @@
                   <a:srgbClr val="1B3B6F"/>
                 </a:solidFill>
                 <a:latin typeface="Amiri" pitchFamily="2" charset="-78"/>
+                <a:ea typeface="Amiri" pitchFamily="2" charset="-78"/>
                 <a:cs typeface="Amiri" pitchFamily="2" charset="-78"/>
               </a:rPr>
               <a:t>يَسُرُّنِي أَنْ أُقَدِّمَ نَفْسِي: وُلِدْتُ فِي مَانْشِسْتَرَ لِأَبٍ سُودَانِيٍّ وَأُمٍّ صُومَالِيَّةٍ، فَأَنَا بَرِيطَانِيٌّ، غَيْرَ أَنَّ جُذُورِي إِفْرِيقِيَّةٌ.</a:t>
@@ -14216,6 +14330,7 @@
                   <a:srgbClr val="1B3B6F"/>
                 </a:solidFill>
                 <a:latin typeface="Amiri" pitchFamily="2" charset="-78"/>
+                <a:ea typeface="Amiri" pitchFamily="2" charset="-78"/>
                 <a:cs typeface="Amiri" pitchFamily="2" charset="-78"/>
               </a:rPr>
               <a:t>عَرِّفْنَا بِنَفْسِكَ وَبِهُوِيَّتِكَ.</a:t>
@@ -14319,6 +14434,7 @@
                   <a:srgbClr val="1B3B6F"/>
                 </a:solidFill>
                 <a:latin typeface="Amiri" pitchFamily="2" charset="-78"/>
+                <a:ea typeface="Amiri" pitchFamily="2" charset="-78"/>
                 <a:cs typeface="Amiri" pitchFamily="2" charset="-78"/>
               </a:rPr>
               <a:t>أَرَى أَنَّ اللُّغَةَ جِسْرٌ؛ أَوَّلًا، تُمَكِّنُنَا مِنَ التَّوَاصُلِ، وَبِالإِضَافَةِ إِلَى ذٰلِكَ، تُتِيحُ لَنَا أَنْ نَفْهَمَ طَرِيقَةَ تَفْكِيرِ الآخَرِينَ.</a:t>
@@ -14395,6 +14511,7 @@
                   <a:srgbClr val="1B3B6F"/>
                 </a:solidFill>
                 <a:latin typeface="Amiri" pitchFamily="2" charset="-78"/>
+                <a:ea typeface="Amiri" pitchFamily="2" charset="-78"/>
                 <a:cs typeface="Amiri" pitchFamily="2" charset="-78"/>
               </a:rPr>
               <a:t>مَا قِيمَةُ اللُّغَاتِ فِي رَأْيِكَ؟</a:t>
@@ -14498,6 +14615,7 @@
                   <a:srgbClr val="1B3B6F"/>
                 </a:solidFill>
                 <a:latin typeface="Amiri" pitchFamily="2" charset="-78"/>
+                <a:ea typeface="Amiri" pitchFamily="2" charset="-78"/>
                 <a:cs typeface="Amiri" pitchFamily="2" charset="-78"/>
               </a:rPr>
               <a:t>عِنْدَمَا كُنْتُ فِي الابْتِدَائِيَّةِ، كَانَ بَعْضُ الزُّمَلَاءِ يَسْخَرُونَ مِنْ اسْمِي، فَقَدَّمْتُ عَرْضًا عَنْ ثَقَافَتِي، وَمُنْذُ ذٰلِكَ اليَوْمِ تَغَيَّرَتْ نَظْرَتُهُمْ.</a:t>
@@ -14574,6 +14692,7 @@
                   <a:srgbClr val="1B3B6F"/>
                 </a:solidFill>
                 <a:latin typeface="Amiri" pitchFamily="2" charset="-78"/>
+                <a:ea typeface="Amiri" pitchFamily="2" charset="-78"/>
                 <a:cs typeface="Amiri" pitchFamily="2" charset="-78"/>
               </a:rPr>
               <a:t>هَلْ وَاجَهْتَ صُعُوبَةً بِسَبَبِ أَصْلِكَ؟</a:t>
@@ -14677,6 +14796,7 @@
                   <a:srgbClr val="1B3B6F"/>
                 </a:solidFill>
                 <a:latin typeface="Amiri" pitchFamily="2" charset="-78"/>
+                <a:ea typeface="Amiri" pitchFamily="2" charset="-78"/>
                 <a:cs typeface="Amiri" pitchFamily="2" charset="-78"/>
               </a:rPr>
               <a:t>صَحِيحٌ أَنَّ الإِنْجْلِيزِيَّةَ تُسَيْطِرُ عَلَى حَيَاتِي اليَوْمِيَّةِ، غَيْرَ أَنَّنِي أَقْرَأُ بِالعَرَبِيَّةِ كُلَّ يَوْمٍ؛ لِذٰلِكَ لَا أَخْشَى ذٰلِكَ.</a:t>
@@ -14753,6 +14873,7 @@
                   <a:srgbClr val="1B3B6F"/>
                 </a:solidFill>
                 <a:latin typeface="Amiri" pitchFamily="2" charset="-78"/>
+                <a:ea typeface="Amiri" pitchFamily="2" charset="-78"/>
                 <a:cs typeface="Amiri" pitchFamily="2" charset="-78"/>
               </a:rPr>
               <a:t>أَلَا تَخْشَى أَنْ تَضِيعَ لُغَتُكَ الأُمُّ؟</a:t>
@@ -14856,6 +14977,7 @@
                   <a:srgbClr val="1B3B6F"/>
                 </a:solidFill>
                 <a:latin typeface="Amiri" pitchFamily="2" charset="-78"/>
+                <a:ea typeface="Amiri" pitchFamily="2" charset="-78"/>
                 <a:cs typeface="Amiri" pitchFamily="2" charset="-78"/>
               </a:rPr>
               <a:t>لَوْ مَثَّلْتُ بَلَدِي، لَقُلْتُ إِنَّ تَعَدُّدَ الجِنْسِيَّاتِ وَاللُّغَاتِ لَيْسَ مُشْكِلَةً، بَلْ هُوَ قُوَّةٌ تَجْمَعُ النَّاسَ.</a:t>
@@ -14932,6 +15054,7 @@
                   <a:srgbClr val="1B3B6F"/>
                 </a:solidFill>
                 <a:latin typeface="Amiri" pitchFamily="2" charset="-78"/>
+                <a:ea typeface="Amiri" pitchFamily="2" charset="-78"/>
                 <a:cs typeface="Amiri" pitchFamily="2" charset="-78"/>
               </a:rPr>
               <a:t>لَوْ مَثَّلْتَ بَلَدَكَ فِي مُؤْتَمَرٍ دُوَلِيٍّ، مَاذَا تَقُولُ؟</a:t>
@@ -15141,6 +15264,7 @@
                   <a:srgbClr val="D4AF37"/>
                 </a:solidFill>
                 <a:latin typeface="Amiri" pitchFamily="2" charset="-78"/>
+                <a:ea typeface="Amiri" pitchFamily="2" charset="-78"/>
                 <a:cs typeface="Amiri" pitchFamily="2" charset="-78"/>
               </a:rPr>
               <a:t>م</a:t>
@@ -15461,6 +15585,7 @@
                   <a:srgbClr val="8A6D1E"/>
                 </a:solidFill>
                 <a:latin typeface="Amiri" pitchFamily="2" charset="-78"/>
+                <a:ea typeface="Amiri" pitchFamily="2" charset="-78"/>
                 <a:cs typeface="Amiri" pitchFamily="2" charset="-78"/>
               </a:rPr>
               <a:t>أَنَا وَبَلَدِي</a:t>
@@ -15741,6 +15866,7 @@
                   <a:srgbClr val="1B3B6F"/>
                 </a:solidFill>
                 <a:latin typeface="Amiri" pitchFamily="2" charset="-78"/>
+                <a:ea typeface="Amiri" pitchFamily="2" charset="-78"/>
                 <a:cs typeface="Amiri" pitchFamily="2" charset="-78"/>
               </a:rPr>
               <a:t>أَنَا مِنْ …</a:t>
@@ -15817,6 +15943,7 @@
                   <a:srgbClr val="1B3B6F"/>
                 </a:solidFill>
                 <a:latin typeface="Amiri" pitchFamily="2" charset="-78"/>
+                <a:ea typeface="Amiri" pitchFamily="2" charset="-78"/>
                 <a:cs typeface="Amiri" pitchFamily="2" charset="-78"/>
               </a:rPr>
               <a:t>مِنْ أَيْنَ أَنْتَ؟</a:t>
@@ -15985,6 +16112,7 @@
                   <a:srgbClr val="1B3B6F"/>
                 </a:solidFill>
                 <a:latin typeface="Amiri" pitchFamily="2" charset="-78"/>
+                <a:ea typeface="Amiri" pitchFamily="2" charset="-78"/>
                 <a:cs typeface="Amiri" pitchFamily="2" charset="-78"/>
               </a:rPr>
               <a:t>أَنَا …</a:t>
@@ -16061,6 +16189,7 @@
                   <a:srgbClr val="1B3B6F"/>
                 </a:solidFill>
                 <a:latin typeface="Amiri" pitchFamily="2" charset="-78"/>
+                <a:ea typeface="Amiri" pitchFamily="2" charset="-78"/>
                 <a:cs typeface="Amiri" pitchFamily="2" charset="-78"/>
               </a:rPr>
               <a:t>مَا جِنْسِيَّتُكَ؟</a:t>
@@ -16229,6 +16358,7 @@
                   <a:srgbClr val="1B3B6F"/>
                 </a:solidFill>
                 <a:latin typeface="Amiri" pitchFamily="2" charset="-78"/>
+                <a:ea typeface="Amiri" pitchFamily="2" charset="-78"/>
                 <a:cs typeface="Amiri" pitchFamily="2" charset="-78"/>
               </a:rPr>
               <a:t>وُلِدْتُ فِي …</a:t>
@@ -16305,6 +16435,7 @@
                   <a:srgbClr val="1B3B6F"/>
                 </a:solidFill>
                 <a:latin typeface="Amiri" pitchFamily="2" charset="-78"/>
+                <a:ea typeface="Amiri" pitchFamily="2" charset="-78"/>
                 <a:cs typeface="Amiri" pitchFamily="2" charset="-78"/>
               </a:rPr>
               <a:t>أَيْنَ وُلِدْتَ؟</a:t>
@@ -16473,6 +16604,7 @@
                   <a:srgbClr val="1B3B6F"/>
                 </a:solidFill>
                 <a:latin typeface="Amiri" pitchFamily="2" charset="-78"/>
+                <a:ea typeface="Amiri" pitchFamily="2" charset="-78"/>
                 <a:cs typeface="Amiri" pitchFamily="2" charset="-78"/>
               </a:rPr>
               <a:t>أَتَكَلَّمُ … لُغَاتٍ: …</a:t>
@@ -16549,6 +16681,7 @@
                   <a:srgbClr val="1B3B6F"/>
                 </a:solidFill>
                 <a:latin typeface="Amiri" pitchFamily="2" charset="-78"/>
+                <a:ea typeface="Amiri" pitchFamily="2" charset="-78"/>
                 <a:cs typeface="Amiri" pitchFamily="2" charset="-78"/>
               </a:rPr>
               <a:t>كَمْ لُغَةً تَتَكَلَّمُ؟</a:t>
@@ -16717,6 +16850,7 @@
                   <a:srgbClr val="1B3B6F"/>
                 </a:solidFill>
                 <a:latin typeface="Amiri" pitchFamily="2" charset="-78"/>
+                <a:ea typeface="Amiri" pitchFamily="2" charset="-78"/>
                 <a:cs typeface="Amiri" pitchFamily="2" charset="-78"/>
               </a:rPr>
               <a:t>لُغَتِي المُفَضَّلَةُ … لِأَنَّ …</a:t>
@@ -16793,6 +16927,7 @@
                   <a:srgbClr val="1B3B6F"/>
                 </a:solidFill>
                 <a:latin typeface="Amiri" pitchFamily="2" charset="-78"/>
+                <a:ea typeface="Amiri" pitchFamily="2" charset="-78"/>
                 <a:cs typeface="Amiri" pitchFamily="2" charset="-78"/>
               </a:rPr>
               <a:t>مَا لُغَتُكَ المُفَضَّلَةُ؟</a:t>
@@ -16947,6 +17082,7 @@
                   <a:srgbClr val="1B3B6F"/>
                 </a:solidFill>
                 <a:latin typeface="Amiri" pitchFamily="2" charset="-78"/>
+                <a:ea typeface="Amiri" pitchFamily="2" charset="-78"/>
                 <a:cs typeface="Amiri" pitchFamily="2" charset="-78"/>
               </a:rPr>
               <a:t>ـِيٌّ</a:t>
@@ -16973,6 +17109,7 @@
                   <a:srgbClr val="1B3B6F"/>
                 </a:solidFill>
                 <a:latin typeface="Amiri" pitchFamily="2" charset="-78"/>
+                <a:ea typeface="Amiri" pitchFamily="2" charset="-78"/>
                 <a:cs typeface="Amiri" pitchFamily="2" charset="-78"/>
               </a:rPr>
               <a:t>ـِيَّةٌ</a:t>
@@ -16999,6 +17136,7 @@
                   <a:srgbClr val="1B3B6F"/>
                 </a:solidFill>
                 <a:latin typeface="Amiri" pitchFamily="2" charset="-78"/>
+                <a:ea typeface="Amiri" pitchFamily="2" charset="-78"/>
                 <a:cs typeface="Amiri" pitchFamily="2" charset="-78"/>
               </a:rPr>
               <a:t>عَفْوًا، هَلْ يُمْكِنُ أَنْ تُعِيدَ السُّؤَالَ؟</a:t>
@@ -17132,6 +17270,7 @@
                   <a:srgbClr val="D4AF37"/>
                 </a:solidFill>
                 <a:latin typeface="Amiri" pitchFamily="2" charset="-78"/>
+                <a:ea typeface="Amiri" pitchFamily="2" charset="-78"/>
                 <a:cs typeface="Amiri" pitchFamily="2" charset="-78"/>
               </a:rPr>
               <a:t>م</a:t>
@@ -17452,6 +17591,7 @@
                   <a:srgbClr val="8A6D1E"/>
                 </a:solidFill>
                 <a:latin typeface="Amiri" pitchFamily="2" charset="-78"/>
+                <a:ea typeface="Amiri" pitchFamily="2" charset="-78"/>
                 <a:cs typeface="Amiri" pitchFamily="2" charset="-78"/>
               </a:rPr>
               <a:t>أُسْرَتِي وَلُغَاتُهَا</a:t>
@@ -17732,6 +17872,7 @@
                   <a:srgbClr val="1B3B6F"/>
                 </a:solidFill>
                 <a:latin typeface="Amiri" pitchFamily="2" charset="-78"/>
+                <a:ea typeface="Amiri" pitchFamily="2" charset="-78"/>
                 <a:cs typeface="Amiri" pitchFamily="2" charset="-78"/>
               </a:rPr>
               <a:t>يَقَعُ … فِي … وَعَاصِمَتُهُ … وَفِيهِ …</a:t>
@@ -17808,6 +17949,7 @@
                   <a:srgbClr val="1B3B6F"/>
                 </a:solidFill>
                 <a:latin typeface="Amiri" pitchFamily="2" charset="-78"/>
+                <a:ea typeface="Amiri" pitchFamily="2" charset="-78"/>
                 <a:cs typeface="Amiri" pitchFamily="2" charset="-78"/>
               </a:rPr>
               <a:t>صِفْ بَلَدَ أُسْرَتِكَ.</a:t>
@@ -17911,6 +18053,7 @@
                   <a:srgbClr val="1B3B6F"/>
                 </a:solidFill>
                 <a:latin typeface="Amiri" pitchFamily="2" charset="-78"/>
+                <a:ea typeface="Amiri" pitchFamily="2" charset="-78"/>
                 <a:cs typeface="Amiri" pitchFamily="2" charset="-78"/>
               </a:rPr>
               <a:t>أَتَكَلَّمُ … مَعَ … أَمَّا مَعَ أَصْدِقَائِي فَأَتَكَلَّمُ …</a:t>
@@ -17987,6 +18130,7 @@
                   <a:srgbClr val="1B3B6F"/>
                 </a:solidFill>
                 <a:latin typeface="Amiri" pitchFamily="2" charset="-78"/>
+                <a:ea typeface="Amiri" pitchFamily="2" charset="-78"/>
                 <a:cs typeface="Amiri" pitchFamily="2" charset="-78"/>
               </a:rPr>
               <a:t>مَعَ مَنْ تَتَكَلَّمُ كُلَّ لُغَةٍ؟</a:t>
@@ -18090,6 +18234,7 @@
                   <a:srgbClr val="1B3B6F"/>
                 </a:solidFill>
                 <a:latin typeface="Amiri" pitchFamily="2" charset="-78"/>
+                <a:ea typeface="Amiri" pitchFamily="2" charset="-78"/>
                 <a:cs typeface="Amiri" pitchFamily="2" charset="-78"/>
               </a:rPr>
               <a:t>بَدَأْتُ … عِنْدَمَا كُنْتُ … وَالآنَ …</a:t>
@@ -18166,6 +18311,7 @@
                   <a:srgbClr val="1B3B6F"/>
                 </a:solidFill>
                 <a:latin typeface="Amiri" pitchFamily="2" charset="-78"/>
+                <a:ea typeface="Amiri" pitchFamily="2" charset="-78"/>
                 <a:cs typeface="Amiri" pitchFamily="2" charset="-78"/>
               </a:rPr>
               <a:t>مَتَى بَدَأْتَ تَتَعَلَّمُ العَرَبِيَّةَ؟</a:t>
@@ -18269,6 +18415,7 @@
                   <a:srgbClr val="1B3B6F"/>
                 </a:solidFill>
                 <a:latin typeface="Amiri" pitchFamily="2" charset="-78"/>
+                <a:ea typeface="Amiri" pitchFamily="2" charset="-78"/>
                 <a:cs typeface="Amiri" pitchFamily="2" charset="-78"/>
               </a:rPr>
               <a:t>نَعَمْ، زُرْتُ … وَتَكَلَّمْتُ …</a:t>
@@ -18345,6 +18492,7 @@
                   <a:srgbClr val="1B3B6F"/>
                 </a:solidFill>
                 <a:latin typeface="Amiri" pitchFamily="2" charset="-78"/>
+                <a:ea typeface="Amiri" pitchFamily="2" charset="-78"/>
                 <a:cs typeface="Amiri" pitchFamily="2" charset="-78"/>
               </a:rPr>
               <a:t>هَلْ زُرْتَ بَلَدًا عَرَبِيًّا؟</a:t>
@@ -18448,6 +18596,7 @@
                   <a:srgbClr val="1B3B6F"/>
                 </a:solidFill>
                 <a:latin typeface="Amiri" pitchFamily="2" charset="-78"/>
+                <a:ea typeface="Amiri" pitchFamily="2" charset="-78"/>
                 <a:cs typeface="Amiri" pitchFamily="2" charset="-78"/>
               </a:rPr>
               <a:t>سَأَتَعَلَّمُ … لِأَنَّ …</a:t>
@@ -18524,6 +18673,7 @@
                   <a:srgbClr val="1B3B6F"/>
                 </a:solidFill>
                 <a:latin typeface="Amiri" pitchFamily="2" charset="-78"/>
+                <a:ea typeface="Amiri" pitchFamily="2" charset="-78"/>
                 <a:cs typeface="Amiri" pitchFamily="2" charset="-78"/>
               </a:rPr>
               <a:t>أَيُّ لُغَةٍ سَتَتَعَلَّمُ فِي المُسْتَقْبَلِ؟</a:t>
@@ -18733,6 +18883,7 @@
                   <a:srgbClr val="D4AF37"/>
                 </a:solidFill>
                 <a:latin typeface="Amiri" pitchFamily="2" charset="-78"/>
+                <a:ea typeface="Amiri" pitchFamily="2" charset="-78"/>
                 <a:cs typeface="Amiri" pitchFamily="2" charset="-78"/>
               </a:rPr>
               <a:t>م</a:t>
@@ -19053,6 +19204,7 @@
                   <a:srgbClr val="8A6D1E"/>
                 </a:solidFill>
                 <a:latin typeface="Amiri" pitchFamily="2" charset="-78"/>
+                <a:ea typeface="Amiri" pitchFamily="2" charset="-78"/>
                 <a:cs typeface="Amiri" pitchFamily="2" charset="-78"/>
               </a:rPr>
               <a:t>الجِنْسِيَّةُ وَاللُّغَةُ وَالهُوِيَّةُ</a:t>
@@ -19333,6 +19485,7 @@
                   <a:srgbClr val="1B3B6F"/>
                 </a:solidFill>
                 <a:latin typeface="Amiri" pitchFamily="2" charset="-78"/>
+                <a:ea typeface="Amiri" pitchFamily="2" charset="-78"/>
                 <a:cs typeface="Amiri" pitchFamily="2" charset="-78"/>
               </a:rPr>
               <a:t>صَحِيحٌ أَنَّ … غَيْرَ أَنَّ …</a:t>
@@ -19409,6 +19562,7 @@
                   <a:srgbClr val="1B3B6F"/>
                 </a:solidFill>
                 <a:latin typeface="Amiri" pitchFamily="2" charset="-78"/>
+                <a:ea typeface="Amiri" pitchFamily="2" charset="-78"/>
                 <a:cs typeface="Amiri" pitchFamily="2" charset="-78"/>
               </a:rPr>
               <a:t>هَلْ تُحَدِّدُ الجِنْسِيَّةُ هُوِيَّةَ الإِنْسَانِ؟</a:t>
@@ -19512,6 +19666,7 @@
                   <a:srgbClr val="1B3B6F"/>
                 </a:solidFill>
                 <a:latin typeface="Amiri" pitchFamily="2" charset="-78"/>
+                <a:ea typeface="Amiri" pitchFamily="2" charset="-78"/>
                 <a:cs typeface="Amiri" pitchFamily="2" charset="-78"/>
               </a:rPr>
               <a:t>أَرَى أَنَّ … لِأَنَّ … مِمَّا …</a:t>
@@ -19588,6 +19743,7 @@
                   <a:srgbClr val="1B3B6F"/>
                 </a:solidFill>
                 <a:latin typeface="Amiri" pitchFamily="2" charset="-78"/>
+                <a:ea typeface="Amiri" pitchFamily="2" charset="-78"/>
                 <a:cs typeface="Amiri" pitchFamily="2" charset="-78"/>
               </a:rPr>
               <a:t>هَلْ يَجِبُ أَنْ يَتَعَلَّمَ كُلُّ طَالِبٍ لُغَةً ثَانِيَةً؟</a:t>
@@ -19691,6 +19847,7 @@
                   <a:srgbClr val="1B3B6F"/>
                 </a:solidFill>
                 <a:latin typeface="Amiri" pitchFamily="2" charset="-78"/>
+                <a:ea typeface="Amiri" pitchFamily="2" charset="-78"/>
                 <a:cs typeface="Amiri" pitchFamily="2" charset="-78"/>
               </a:rPr>
               <a:t>كَانَ جَدِّي … أَمَّا أَنَا فَأَتَكَلَّمُ …</a:t>
@@ -19767,6 +19924,7 @@
                   <a:srgbClr val="1B3B6F"/>
                 </a:solidFill>
                 <a:latin typeface="Amiri" pitchFamily="2" charset="-78"/>
+                <a:ea typeface="Amiri" pitchFamily="2" charset="-78"/>
                 <a:cs typeface="Amiri" pitchFamily="2" charset="-78"/>
               </a:rPr>
               <a:t>كَيْفَ تَغَيَّرَتْ لُغَاتُ أُسْرَتِكَ عَبْرَ الأَجْيَالِ؟</a:t>
@@ -19870,6 +20028,7 @@
                   <a:srgbClr val="1B3B6F"/>
                 </a:solidFill>
                 <a:latin typeface="Amiri" pitchFamily="2" charset="-78"/>
+                <a:ea typeface="Amiri" pitchFamily="2" charset="-78"/>
                 <a:cs typeface="Amiri" pitchFamily="2" charset="-78"/>
               </a:rPr>
               <a:t>مِنْ نَاحِيَةٍ … وَمِنْ نَاحِيَةٍ أُخْرَى …</a:t>
@@ -19946,6 +20105,7 @@
                   <a:srgbClr val="1B3B6F"/>
                 </a:solidFill>
                 <a:latin typeface="Amiri" pitchFamily="2" charset="-78"/>
+                <a:ea typeface="Amiri" pitchFamily="2" charset="-78"/>
                 <a:cs typeface="Amiri" pitchFamily="2" charset="-78"/>
               </a:rPr>
               <a:t>مَا الصُّعُوبَاتُ الَّتِي يُوَاجِهُهَا مَنْ يَعِيشُ بَيْنَ ثَقَافَتَيْنِ؟</a:t>
@@ -20049,6 +20209,7 @@
                   <a:srgbClr val="1B3B6F"/>
                 </a:solidFill>
                 <a:latin typeface="Amiri" pitchFamily="2" charset="-78"/>
+                <a:ea typeface="Amiri" pitchFamily="2" charset="-78"/>
                 <a:cs typeface="Amiri" pitchFamily="2" charset="-78"/>
               </a:rPr>
               <a:t>لَوِ اسْتَطَعْتُ …، لَسَافَرْتُ …</a:t>
@@ -20125,6 +20286,7 @@
                   <a:srgbClr val="1B3B6F"/>
                 </a:solidFill>
                 <a:latin typeface="Amiri" pitchFamily="2" charset="-78"/>
+                <a:ea typeface="Amiri" pitchFamily="2" charset="-78"/>
                 <a:cs typeface="Amiri" pitchFamily="2" charset="-78"/>
               </a:rPr>
               <a:t>لَوِ اسْتَطَعْتَ أَنْ تَتَكَلَّمَ كُلَّ لُغَاتِ العَالَمِ، مَاذَا تَفْعَلُ؟</a:t>
@@ -20334,6 +20496,7 @@
                   <a:srgbClr val="D4AF37"/>
                 </a:solidFill>
                 <a:latin typeface="Amiri" pitchFamily="2" charset="-78"/>
+                <a:ea typeface="Amiri" pitchFamily="2" charset="-78"/>
                 <a:cs typeface="Amiri" pitchFamily="2" charset="-78"/>
               </a:rPr>
               <a:t>م</a:t>
@@ -20654,6 +20817,7 @@
                   <a:srgbClr val="8A6D1E"/>
                 </a:solidFill>
                 <a:latin typeface="Amiri" pitchFamily="2" charset="-78"/>
+                <a:ea typeface="Amiri" pitchFamily="2" charset="-78"/>
                 <a:cs typeface="Amiri" pitchFamily="2" charset="-78"/>
               </a:rPr>
               <a:t>آدَابُ الصَّفِّ</a:t>
@@ -22185,6 +22349,7 @@
                   <a:srgbClr val="D4AF37"/>
                 </a:solidFill>
                 <a:latin typeface="Amiri" pitchFamily="2" charset="-78"/>
+                <a:ea typeface="Amiri" pitchFamily="2" charset="-78"/>
                 <a:cs typeface="Amiri" pitchFamily="2" charset="-78"/>
               </a:rPr>
               <a:t>م</a:t>
@@ -22505,6 +22670,7 @@
                   <a:srgbClr val="8A6D1E"/>
                 </a:solidFill>
                 <a:latin typeface="Amiri" pitchFamily="2" charset="-78"/>
+                <a:ea typeface="Amiri" pitchFamily="2" charset="-78"/>
                 <a:cs typeface="Amiri" pitchFamily="2" charset="-78"/>
               </a:rPr>
               <a:t>نَمُوذَجُ الإِجَابَةِ</a:t>
@@ -22747,6 +22913,7 @@
                   <a:srgbClr val="1B3B6F"/>
                 </a:solidFill>
                 <a:latin typeface="Amiri" pitchFamily="2" charset="-78"/>
+                <a:ea typeface="Amiri" pitchFamily="2" charset="-78"/>
                 <a:cs typeface="Amiri" pitchFamily="2" charset="-78"/>
               </a:rPr>
               <a:t>أَنَا مِنْ بَرِيطَانْيَا، وَأَصْلِي مِنْ بَاكِسْتَانَ.</a:t>
@@ -22823,6 +22990,7 @@
                   <a:srgbClr val="1B3B6F"/>
                 </a:solidFill>
                 <a:latin typeface="Amiri" pitchFamily="2" charset="-78"/>
+                <a:ea typeface="Amiri" pitchFamily="2" charset="-78"/>
                 <a:cs typeface="Amiri" pitchFamily="2" charset="-78"/>
               </a:rPr>
               <a:t>مِنْ أَيْنَ أَنْتَ؟</a:t>
@@ -22926,6 +23094,7 @@
                   <a:srgbClr val="1B3B6F"/>
                 </a:solidFill>
                 <a:latin typeface="Amiri" pitchFamily="2" charset="-78"/>
+                <a:ea typeface="Amiri" pitchFamily="2" charset="-78"/>
                 <a:cs typeface="Amiri" pitchFamily="2" charset="-78"/>
               </a:rPr>
               <a:t>أَنَا بَرِيطَانِيٌّ.</a:t>
@@ -23002,6 +23171,7 @@
                   <a:srgbClr val="1B3B6F"/>
                 </a:solidFill>
                 <a:latin typeface="Amiri" pitchFamily="2" charset="-78"/>
+                <a:ea typeface="Amiri" pitchFamily="2" charset="-78"/>
                 <a:cs typeface="Amiri" pitchFamily="2" charset="-78"/>
               </a:rPr>
               <a:t>مَا جِنْسِيَّتُكَ؟</a:t>
@@ -23105,6 +23275,7 @@
                   <a:srgbClr val="1B3B6F"/>
                 </a:solidFill>
                 <a:latin typeface="Amiri" pitchFamily="2" charset="-78"/>
+                <a:ea typeface="Amiri" pitchFamily="2" charset="-78"/>
                 <a:cs typeface="Amiri" pitchFamily="2" charset="-78"/>
               </a:rPr>
               <a:t>وُلِدْتُ فِي مَدِينَةِ لِيدْزَ فِي شَمَالِ إِنْجِلْتِرَا.</a:t>
@@ -23181,6 +23352,7 @@
                   <a:srgbClr val="1B3B6F"/>
                 </a:solidFill>
                 <a:latin typeface="Amiri" pitchFamily="2" charset="-78"/>
+                <a:ea typeface="Amiri" pitchFamily="2" charset="-78"/>
                 <a:cs typeface="Amiri" pitchFamily="2" charset="-78"/>
               </a:rPr>
               <a:t>أَيْنَ وُلِدْتَ؟</a:t>
@@ -23284,6 +23456,7 @@
                   <a:srgbClr val="1B3B6F"/>
                 </a:solidFill>
                 <a:latin typeface="Amiri" pitchFamily="2" charset="-78"/>
+                <a:ea typeface="Amiri" pitchFamily="2" charset="-78"/>
                 <a:cs typeface="Amiri" pitchFamily="2" charset="-78"/>
               </a:rPr>
               <a:t>أَتَكَلَّمُ ثَلَاثَ لُغَاتٍ: الإِنْجْلِيزِيَّةَ وَالأُرْدِيَّةَ وَالعَرَبِيَّةَ.</a:t>
@@ -23360,6 +23533,7 @@
                   <a:srgbClr val="1B3B6F"/>
                 </a:solidFill>
                 <a:latin typeface="Amiri" pitchFamily="2" charset="-78"/>
+                <a:ea typeface="Amiri" pitchFamily="2" charset="-78"/>
                 <a:cs typeface="Amiri" pitchFamily="2" charset="-78"/>
               </a:rPr>
               <a:t>كَمْ لُغَةً تَتَكَلَّمُ؟</a:t>
@@ -23463,6 +23637,7 @@
                   <a:srgbClr val="1B3B6F"/>
                 </a:solidFill>
                 <a:latin typeface="Amiri" pitchFamily="2" charset="-78"/>
+                <a:ea typeface="Amiri" pitchFamily="2" charset="-78"/>
                 <a:cs typeface="Amiri" pitchFamily="2" charset="-78"/>
               </a:rPr>
               <a:t>لُغَتِيَ المُفَضَّلَةُ العَرَبِيَّةُ، لِأَنَّهَا جَمِيلَةٌ.</a:t>
@@ -23539,6 +23714,7 @@
                   <a:srgbClr val="1B3B6F"/>
                 </a:solidFill>
                 <a:latin typeface="Amiri" pitchFamily="2" charset="-78"/>
+                <a:ea typeface="Amiri" pitchFamily="2" charset="-78"/>
                 <a:cs typeface="Amiri" pitchFamily="2" charset="-78"/>
               </a:rPr>
               <a:t>مَا لُغَتُكَ المُفَضَّلَةُ؟</a:t>
@@ -23748,6 +23924,7 @@
                   <a:srgbClr val="D4AF37"/>
                 </a:solidFill>
                 <a:latin typeface="Amiri" pitchFamily="2" charset="-78"/>
+                <a:ea typeface="Amiri" pitchFamily="2" charset="-78"/>
                 <a:cs typeface="Amiri" pitchFamily="2" charset="-78"/>
               </a:rPr>
               <a:t>م</a:t>
@@ -24068,6 +24245,7 @@
                   <a:srgbClr val="8A6D1E"/>
                 </a:solidFill>
                 <a:latin typeface="Amiri" pitchFamily="2" charset="-78"/>
+                <a:ea typeface="Amiri" pitchFamily="2" charset="-78"/>
                 <a:cs typeface="Amiri" pitchFamily="2" charset="-78"/>
               </a:rPr>
               <a:t>نَمُوذَجُ الإِجَابَةِ</a:t>
@@ -24310,6 +24488,7 @@
                   <a:srgbClr val="1B3B6F"/>
                 </a:solidFill>
                 <a:latin typeface="Amiri" pitchFamily="2" charset="-78"/>
+                <a:ea typeface="Amiri" pitchFamily="2" charset="-78"/>
                 <a:cs typeface="Amiri" pitchFamily="2" charset="-78"/>
               </a:rPr>
               <a:t>يَقَعُ اليَمَنُ فِي جَنُوبِ الجَزِيرَةِ العَرَبِيَّةِ، وَعَاصِمَتُهُ صَنْعَاءُ، وَفِيهِ جِبَالٌ عَالِيَةٌ وَمُدُنٌ قَدِيمَةٌ جِدًّا.</a:t>
@@ -24386,6 +24565,7 @@
                   <a:srgbClr val="1B3B6F"/>
                 </a:solidFill>
                 <a:latin typeface="Amiri" pitchFamily="2" charset="-78"/>
+                <a:ea typeface="Amiri" pitchFamily="2" charset="-78"/>
                 <a:cs typeface="Amiri" pitchFamily="2" charset="-78"/>
               </a:rPr>
               <a:t>صِفْ بَلَدَ أُسْرَتِكَ.</a:t>
@@ -24489,6 +24669,7 @@
                   <a:srgbClr val="1B3B6F"/>
                 </a:solidFill>
                 <a:latin typeface="Amiri" pitchFamily="2" charset="-78"/>
+                <a:ea typeface="Amiri" pitchFamily="2" charset="-78"/>
                 <a:cs typeface="Amiri" pitchFamily="2" charset="-78"/>
               </a:rPr>
               <a:t>أَتَكَلَّمُ الصُّومَالِيَّةَ مَعَ جَدِّي، أَمَّا مَعَ أَصْدِقَائِي فَأَتَكَلَّمُ الإِنْجْلِيزِيَّةَ دَائِمًا.</a:t>
@@ -24565,6 +24746,7 @@
                   <a:srgbClr val="1B3B6F"/>
                 </a:solidFill>
                 <a:latin typeface="Amiri" pitchFamily="2" charset="-78"/>
+                <a:ea typeface="Amiri" pitchFamily="2" charset="-78"/>
                 <a:cs typeface="Amiri" pitchFamily="2" charset="-78"/>
               </a:rPr>
               <a:t>مَعَ مَنْ تَتَكَلَّمُ كُلَّ لُغَةٍ؟</a:t>
@@ -24668,6 +24850,7 @@
                   <a:srgbClr val="1B3B6F"/>
                 </a:solidFill>
                 <a:latin typeface="Amiri" pitchFamily="2" charset="-78"/>
+                <a:ea typeface="Amiri" pitchFamily="2" charset="-78"/>
                 <a:cs typeface="Amiri" pitchFamily="2" charset="-78"/>
               </a:rPr>
               <a:t>بَدَأْتُ أَتَعَلَّمُهَا عِنْدَمَا كُنْتُ فِي السَّادِسَةِ فِي المَسْجِدِ، وَالآنَ أَدْرُسُهَا فِي المَدْرَسَةِ أَيْضًا.</a:t>
@@ -24744,6 +24927,7 @@
                   <a:srgbClr val="1B3B6F"/>
                 </a:solidFill>
                 <a:latin typeface="Amiri" pitchFamily="2" charset="-78"/>
+                <a:ea typeface="Amiri" pitchFamily="2" charset="-78"/>
                 <a:cs typeface="Amiri" pitchFamily="2" charset="-78"/>
               </a:rPr>
               <a:t>مَتَى بَدَأْتَ تَتَعَلَّمُ العَرَبِيَّةَ؟</a:t>
@@ -24847,6 +25031,7 @@
                   <a:srgbClr val="1B3B6F"/>
                 </a:solidFill>
                 <a:latin typeface="Amiri" pitchFamily="2" charset="-78"/>
+                <a:ea typeface="Amiri" pitchFamily="2" charset="-78"/>
                 <a:cs typeface="Amiri" pitchFamily="2" charset="-78"/>
               </a:rPr>
               <a:t>نَعَمْ، زُرْتُ الأُرْدُنَّ السَّنَةَ المَاضِيَةَ، وَتَكَلَّمْتُ العَرَبِيَّةَ فِي السُّوقِ لِأَوَّلِ مَرَّةٍ، فَكُنْتُ فَخُورًا جِدًّا.</a:t>
@@ -24923,6 +25108,7 @@
                   <a:srgbClr val="1B3B6F"/>
                 </a:solidFill>
                 <a:latin typeface="Amiri" pitchFamily="2" charset="-78"/>
+                <a:ea typeface="Amiri" pitchFamily="2" charset="-78"/>
                 <a:cs typeface="Amiri" pitchFamily="2" charset="-78"/>
               </a:rPr>
               <a:t>هَلْ زُرْتَ بَلَدًا عَرَبِيًّا؟</a:t>
@@ -25026,6 +25212,7 @@
                   <a:srgbClr val="1B3B6F"/>
                 </a:solidFill>
                 <a:latin typeface="Amiri" pitchFamily="2" charset="-78"/>
+                <a:ea typeface="Amiri" pitchFamily="2" charset="-78"/>
                 <a:cs typeface="Amiri" pitchFamily="2" charset="-78"/>
               </a:rPr>
               <a:t>سَأَتَعَلَّمُ التُّرْكِيَّةَ، لِأَنَّ تُرْكِيَا بَلَدٌ قَرِيبٌ مِنَ العَالَمِ العَرَبِيِّ، وَأُرِيدُ أَنْ أَدْرُسَ هُنَاكَ.</a:t>
@@ -25102,6 +25289,7 @@
                   <a:srgbClr val="1B3B6F"/>
                 </a:solidFill>
                 <a:latin typeface="Amiri" pitchFamily="2" charset="-78"/>
+                <a:ea typeface="Amiri" pitchFamily="2" charset="-78"/>
                 <a:cs typeface="Amiri" pitchFamily="2" charset="-78"/>
               </a:rPr>
               <a:t>أَيُّ لُغَةٍ سَتَتَعَلَّمُ فِي المُسْتَقْبَلِ؟</a:t>
@@ -25311,6 +25499,7 @@
                   <a:srgbClr val="D4AF37"/>
                 </a:solidFill>
                 <a:latin typeface="Amiri" pitchFamily="2" charset="-78"/>
+                <a:ea typeface="Amiri" pitchFamily="2" charset="-78"/>
                 <a:cs typeface="Amiri" pitchFamily="2" charset="-78"/>
               </a:rPr>
               <a:t>م</a:t>
@@ -25631,6 +25820,7 @@
                   <a:srgbClr val="8A6D1E"/>
                 </a:solidFill>
                 <a:latin typeface="Amiri" pitchFamily="2" charset="-78"/>
+                <a:ea typeface="Amiri" pitchFamily="2" charset="-78"/>
                 <a:cs typeface="Amiri" pitchFamily="2" charset="-78"/>
               </a:rPr>
               <a:t>نَمُوذَجُ الإِجَابَةِ</a:t>
@@ -25873,6 +26063,7 @@
                   <a:srgbClr val="1B3B6F"/>
                 </a:solidFill>
                 <a:latin typeface="Amiri" pitchFamily="2" charset="-78"/>
+                <a:ea typeface="Amiri" pitchFamily="2" charset="-78"/>
                 <a:cs typeface="Amiri" pitchFamily="2" charset="-78"/>
               </a:rPr>
               <a:t>صَحِيحٌ أَنَّ الجِنْسِيَّةَ تُكْتَبُ فِي جَوَازِ السَّفَرِ، غَيْرَ أَنَّ الهُوِيَّةَ أَوْسَعُ؛ فَهِيَ اللُّغَةُ وَالدِّينُ وَالذِّكْرَيَاتُ.</a:t>
@@ -25949,6 +26140,7 @@
                   <a:srgbClr val="1B3B6F"/>
                 </a:solidFill>
                 <a:latin typeface="Amiri" pitchFamily="2" charset="-78"/>
+                <a:ea typeface="Amiri" pitchFamily="2" charset="-78"/>
                 <a:cs typeface="Amiri" pitchFamily="2" charset="-78"/>
               </a:rPr>
               <a:t>هَلْ تُحَدِّدُ الجِنْسِيَّةُ هُوِيَّةَ الإِنْسَانِ؟</a:t>
@@ -26052,6 +26244,7 @@
                   <a:srgbClr val="1B3B6F"/>
                 </a:solidFill>
                 <a:latin typeface="Amiri" pitchFamily="2" charset="-78"/>
+                <a:ea typeface="Amiri" pitchFamily="2" charset="-78"/>
                 <a:cs typeface="Amiri" pitchFamily="2" charset="-78"/>
               </a:rPr>
               <a:t>أَرَى أَنَّ ذٰلِكَ ضَرُورِيٌّ، لِأَنَّ العَالَمَ أَصْبَحَ قَرْيَةً صَغِيرَةً، مِمَّا يَجْعَلُ اللُّغَاتِ مَهَارَةً أَسَاسِيَّةً لِلْعَمَلِ.</a:t>
@@ -26128,6 +26321,7 @@
                   <a:srgbClr val="1B3B6F"/>
                 </a:solidFill>
                 <a:latin typeface="Amiri" pitchFamily="2" charset="-78"/>
+                <a:ea typeface="Amiri" pitchFamily="2" charset="-78"/>
                 <a:cs typeface="Amiri" pitchFamily="2" charset="-78"/>
               </a:rPr>
               <a:t>هَلْ يَجِبُ أَنْ يَتَعَلَّمَ كُلُّ طَالِبٍ لُغَةً ثَانِيَةً؟</a:t>
@@ -26231,6 +26425,7 @@
                   <a:srgbClr val="1B3B6F"/>
                 </a:solidFill>
                 <a:latin typeface="Amiri" pitchFamily="2" charset="-78"/>
+                <a:ea typeface="Amiri" pitchFamily="2" charset="-78"/>
                 <a:cs typeface="Amiri" pitchFamily="2" charset="-78"/>
               </a:rPr>
               <a:t>كَانَ جَدِّي يَتَكَلَّمُ البَنْغَالِيَّةَ فَقَطْ، وَتَعَلَّمَ أَبِي الإِنْجْلِيزِيَّةَ فِي العَمَلِ، أَمَّا أَنَا فَأَتَكَلَّمُ ثَلَاثَ لُغَاتٍ.</a:t>
@@ -26307,6 +26502,7 @@
                   <a:srgbClr val="1B3B6F"/>
                 </a:solidFill>
                 <a:latin typeface="Amiri" pitchFamily="2" charset="-78"/>
+                <a:ea typeface="Amiri" pitchFamily="2" charset="-78"/>
                 <a:cs typeface="Amiri" pitchFamily="2" charset="-78"/>
               </a:rPr>
               <a:t>كَيْفَ تَغَيَّرَتْ لُغَاتُ أُسْرَتِكَ عَبْرَ الأَجْيَالِ؟</a:t>
@@ -26516,6 +26712,7 @@
                   <a:srgbClr val="D4AF37"/>
                 </a:solidFill>
                 <a:latin typeface="Amiri" pitchFamily="2" charset="-78"/>
+                <a:ea typeface="Amiri" pitchFamily="2" charset="-78"/>
                 <a:cs typeface="Amiri" pitchFamily="2" charset="-78"/>
               </a:rPr>
               <a:t>م</a:t>
@@ -26836,6 +27033,7 @@
                   <a:srgbClr val="8A6D1E"/>
                 </a:solidFill>
                 <a:latin typeface="Amiri" pitchFamily="2" charset="-78"/>
+                <a:ea typeface="Amiri" pitchFamily="2" charset="-78"/>
                 <a:cs typeface="Amiri" pitchFamily="2" charset="-78"/>
               </a:rPr>
               <a:t>نَمُوذَجُ الإِجَابَةِ</a:t>
@@ -27078,6 +27276,7 @@
                   <a:srgbClr val="1B3B6F"/>
                 </a:solidFill>
                 <a:latin typeface="Amiri" pitchFamily="2" charset="-78"/>
+                <a:ea typeface="Amiri" pitchFamily="2" charset="-78"/>
                 <a:cs typeface="Amiri" pitchFamily="2" charset="-78"/>
               </a:rPr>
               <a:t>مِنْ نَاحِيَةٍ، قَدْ يَشْعُرُ بِأَنَّهُ غَرِيبٌ فِي البَلَدَيْنِ، وَمِنْ نَاحِيَةٍ أُخْرَى، يَمْلِكُ مَفَاتِيحَ عَالَمَيْنِ بَدَلًا مِنْ عَالَمٍ وَاحِدٍ.</a:t>
@@ -27157,6 +27356,7 @@
                   <a:srgbClr val="1B3B6F"/>
                 </a:solidFill>
                 <a:latin typeface="Amiri" pitchFamily="2" charset="-78"/>
+                <a:ea typeface="Amiri" pitchFamily="2" charset="-78"/>
                 <a:cs typeface="Amiri" pitchFamily="2" charset="-78"/>
               </a:rPr>
               <a:t>مَا الصُّعُوبَاتُ الَّتِي يُوَاجِهُهَا مَنْ يَعِيشُ بَيْنَ ثَقَافَتَيْنِ؟</a:t>
@@ -27260,6 +27460,7 @@
                   <a:srgbClr val="1B3B6F"/>
                 </a:solidFill>
                 <a:latin typeface="Amiri" pitchFamily="2" charset="-78"/>
+                <a:ea typeface="Amiri" pitchFamily="2" charset="-78"/>
                 <a:cs typeface="Amiri" pitchFamily="2" charset="-78"/>
               </a:rPr>
               <a:t>لَوِ اسْتَطَعْتُ ذٰلِكَ، لَسَافَرْتُ إِلَى كُلِّ القَارَّاتِ، وَلَعَمِلْتُ مُتَرْجِمًا فِي الأُمَمِ المُتَّحِدَةِ لِأُسَاعِدَ عَلَى حَلِّ النِّزَاعَاتِ.</a:t>
@@ -27339,6 +27540,7 @@
                   <a:srgbClr val="1B3B6F"/>
                 </a:solidFill>
                 <a:latin typeface="Amiri" pitchFamily="2" charset="-78"/>
+                <a:ea typeface="Amiri" pitchFamily="2" charset="-78"/>
                 <a:cs typeface="Amiri" pitchFamily="2" charset="-78"/>
               </a:rPr>
               <a:t>لَوِ اسْتَطَعْتَ أَنْ تَتَكَلَّمَ كُلَّ لُغَاتِ العَالَمِ، مَاذَا تَفْعَلُ؟</a:t>
@@ -27548,6 +27750,7 @@
                   <a:srgbClr val="D4AF37"/>
                 </a:solidFill>
                 <a:latin typeface="Amiri" pitchFamily="2" charset="-78"/>
+                <a:ea typeface="Amiri" pitchFamily="2" charset="-78"/>
                 <a:cs typeface="Amiri" pitchFamily="2" charset="-78"/>
               </a:rPr>
               <a:t>م</a:t>
@@ -27868,6 +28071,7 @@
                   <a:srgbClr val="8A6D1E"/>
                 </a:solidFill>
                 <a:latin typeface="Amiri" pitchFamily="2" charset="-78"/>
+                <a:ea typeface="Amiri" pitchFamily="2" charset="-78"/>
                 <a:cs typeface="Amiri" pitchFamily="2" charset="-78"/>
               </a:rPr>
               <a:t>قَيِّمْ عَمَلَكَ</a:t>
@@ -29112,6 +29316,7 @@
                   <a:srgbClr val="FFFFFF"/>
                 </a:solidFill>
                 <a:latin typeface="Amiri" pitchFamily="2" charset="-78"/>
+                <a:ea typeface="Amiri" pitchFamily="2" charset="-78"/>
                 <a:cs typeface="Amiri" pitchFamily="2" charset="-78"/>
               </a:rPr>
               <a:t>أَحْسَنْتُمْ! إِلَى اللِّقَاءِ</a:t>
@@ -29264,6 +29469,7 @@
                   <a:srgbClr val="D4AF37"/>
                 </a:solidFill>
                 <a:latin typeface="Amiri" pitchFamily="2" charset="-78"/>
+                <a:ea typeface="Amiri" pitchFamily="2" charset="-78"/>
                 <a:cs typeface="Amiri" pitchFamily="2" charset="-78"/>
               </a:rPr>
               <a:t>وَرْشَةُ الكِتَابَةِ</a:t>
@@ -29397,6 +29603,7 @@
                   <a:srgbClr val="D4AF37"/>
                 </a:solidFill>
                 <a:latin typeface="Amiri" pitchFamily="2" charset="-78"/>
+                <a:ea typeface="Amiri" pitchFamily="2" charset="-78"/>
                 <a:cs typeface="Amiri" pitchFamily="2" charset="-78"/>
               </a:rPr>
               <a:t>م</a:t>
@@ -29717,6 +29924,7 @@
                   <a:srgbClr val="8A6D1E"/>
                 </a:solidFill>
                 <a:latin typeface="Amiri" pitchFamily="2" charset="-78"/>
+                <a:ea typeface="Amiri" pitchFamily="2" charset="-78"/>
                 <a:cs typeface="Amiri" pitchFamily="2" charset="-78"/>
               </a:rPr>
               <a:t>خَرِيطَةُ الوَرْشَةِ</a:t>
@@ -30031,6 +30239,7 @@
                   <a:srgbClr val="1B3B6F"/>
                 </a:solidFill>
                 <a:latin typeface="Amiri" pitchFamily="2" charset="-78"/>
+                <a:ea typeface="Amiri" pitchFamily="2" charset="-78"/>
                 <a:cs typeface="Amiri" pitchFamily="2" charset="-78"/>
               </a:rPr>
               <a:t>كَيْفَ</a:t>
@@ -30307,6 +30516,7 @@
                   <a:srgbClr val="1E6B52"/>
                 </a:solidFill>
                 <a:latin typeface="Amiri" pitchFamily="2" charset="-78"/>
+                <a:ea typeface="Amiri" pitchFamily="2" charset="-78"/>
                 <a:cs typeface="Amiri" pitchFamily="2" charset="-78"/>
               </a:rPr>
               <a:t>تَمْثِيلُ الدَّوْرِ</a:t>
@@ -30583,6 +30793,7 @@
                   <a:srgbClr val="8A6D1E"/>
                 </a:solidFill>
                 <a:latin typeface="Amiri" pitchFamily="2" charset="-78"/>
+                <a:ea typeface="Amiri" pitchFamily="2" charset="-78"/>
                 <a:cs typeface="Amiri" pitchFamily="2" charset="-78"/>
               </a:rPr>
               <a:t>النَّمُوذَجُ</a:t>
@@ -30859,6 +31070,7 @@
                   <a:srgbClr val="1E6B52"/>
                 </a:solidFill>
                 <a:latin typeface="Amiri" pitchFamily="2" charset="-78"/>
+                <a:ea typeface="Amiri" pitchFamily="2" charset="-78"/>
                 <a:cs typeface="Amiri" pitchFamily="2" charset="-78"/>
               </a:rPr>
               <a:t>المُحَادَثَةُ</a:t>
@@ -31135,6 +31347,7 @@
                   <a:srgbClr val="8A6D1E"/>
                 </a:solidFill>
                 <a:latin typeface="Amiri" pitchFamily="2" charset="-78"/>
+                <a:ea typeface="Amiri" pitchFamily="2" charset="-78"/>
                 <a:cs typeface="Amiri" pitchFamily="2" charset="-78"/>
               </a:rPr>
               <a:t>قَيِّمْ</a:t>
@@ -31378,6 +31591,7 @@
                   <a:srgbClr val="D4AF37"/>
                 </a:solidFill>
                 <a:latin typeface="Amiri" pitchFamily="2" charset="-78"/>
+                <a:ea typeface="Amiri" pitchFamily="2" charset="-78"/>
                 <a:cs typeface="Amiri" pitchFamily="2" charset="-78"/>
               </a:rPr>
               <a:t>م</a:t>
@@ -31698,6 +31912,7 @@
                   <a:srgbClr val="8A6D1E"/>
                 </a:solidFill>
                 <a:latin typeface="Amiri" pitchFamily="2" charset="-78"/>
+                <a:ea typeface="Amiri" pitchFamily="2" charset="-78"/>
                 <a:cs typeface="Amiri" pitchFamily="2" charset="-78"/>
               </a:rPr>
               <a:t>امْتِحَانُ التَّحَدُّثِ</a:t>
@@ -32322,6 +32537,7 @@
                   <a:srgbClr val="1B3B6F"/>
                 </a:solidFill>
                 <a:latin typeface="Amiri" pitchFamily="2" charset="-78"/>
+                <a:ea typeface="Amiri" pitchFamily="2" charset="-78"/>
                 <a:cs typeface="Amiri" pitchFamily="2" charset="-78"/>
               </a:rPr>
               <a:t>عَفْوًا، هَلْ يُمْكِنُ أَنْ تُعِيدَ السُّؤَالَ؟</a:t>
@@ -32421,6 +32637,7 @@
                   <a:srgbClr val="1B3B6F"/>
                 </a:solidFill>
                 <a:latin typeface="Amiri" pitchFamily="2" charset="-78"/>
+                <a:ea typeface="Amiri" pitchFamily="2" charset="-78"/>
                 <a:cs typeface="Amiri" pitchFamily="2" charset="-78"/>
               </a:rPr>
               <a:t>لَحْظَةً، دَعْنِي أُفَكِّرُ …</a:t>
@@ -32520,6 +32737,7 @@
                   <a:srgbClr val="1B3B6F"/>
                 </a:solidFill>
                 <a:latin typeface="Amiri" pitchFamily="2" charset="-78"/>
+                <a:ea typeface="Amiri" pitchFamily="2" charset="-78"/>
                 <a:cs typeface="Amiri" pitchFamily="2" charset="-78"/>
               </a:rPr>
               <a:t>أَقْصِدُ …</a:t>
@@ -32691,6 +32909,7 @@
                   <a:srgbClr val="D4AF37"/>
                 </a:solidFill>
                 <a:latin typeface="Amiri" pitchFamily="2" charset="-78"/>
+                <a:ea typeface="Amiri" pitchFamily="2" charset="-78"/>
                 <a:cs typeface="Amiri" pitchFamily="2" charset="-78"/>
               </a:rPr>
               <a:t>م</a:t>
@@ -33011,6 +33230,7 @@
                   <a:srgbClr val="8A6D1E"/>
                 </a:solidFill>
                 <a:latin typeface="Amiri" pitchFamily="2" charset="-78"/>
+                <a:ea typeface="Amiri" pitchFamily="2" charset="-78"/>
                 <a:cs typeface="Amiri" pitchFamily="2" charset="-78"/>
               </a:rPr>
               <a:t>البَلَدُ وَالجِنْسِيَّةُ</a:t>
@@ -33314,6 +33534,7 @@
                   <a:srgbClr val="1B3B6F"/>
                 </a:solidFill>
                 <a:latin typeface="Amiri" pitchFamily="2" charset="-78"/>
+                <a:ea typeface="Amiri" pitchFamily="2" charset="-78"/>
                 <a:cs typeface="Amiri" pitchFamily="2" charset="-78"/>
               </a:rPr>
               <a:t>بَلَدٌ</a:t>
@@ -33471,6 +33692,7 @@
                   <a:srgbClr val="1B3B6F"/>
                 </a:solidFill>
                 <a:latin typeface="Amiri" pitchFamily="2" charset="-78"/>
+                <a:ea typeface="Amiri" pitchFamily="2" charset="-78"/>
                 <a:cs typeface="Amiri" pitchFamily="2" charset="-78"/>
               </a:rPr>
               <a:t>عَاصِمَةٌ</a:t>
@@ -33574,6 +33796,7 @@
                   <a:srgbClr val="1B3B6F"/>
                 </a:solidFill>
                 <a:latin typeface="Amiri" pitchFamily="2" charset="-78"/>
+                <a:ea typeface="Amiri" pitchFamily="2" charset="-78"/>
                 <a:cs typeface="Amiri" pitchFamily="2" charset="-78"/>
               </a:rPr>
               <a:t>بُلْدَانٌ</a:t>
@@ -33839,6 +34062,7 @@
                   <a:srgbClr val="1B3B6F"/>
                 </a:solidFill>
                 <a:latin typeface="Amiri" pitchFamily="2" charset="-78"/>
+                <a:ea typeface="Amiri" pitchFamily="2" charset="-78"/>
                 <a:cs typeface="Amiri" pitchFamily="2" charset="-78"/>
               </a:rPr>
               <a:t>جِنْسِيَّةٌ</a:t>
@@ -33996,6 +34220,7 @@
                   <a:srgbClr val="1B3B6F"/>
                 </a:solidFill>
                 <a:latin typeface="Amiri" pitchFamily="2" charset="-78"/>
+                <a:ea typeface="Amiri" pitchFamily="2" charset="-78"/>
                 <a:cs typeface="Amiri" pitchFamily="2" charset="-78"/>
               </a:rPr>
               <a:t>أَحْمِلُ الجِنْسِيَّةَ …</a:t>
@@ -34099,6 +34324,7 @@
                   <a:srgbClr val="1B3B6F"/>
                 </a:solidFill>
                 <a:latin typeface="Amiri" pitchFamily="2" charset="-78"/>
+                <a:ea typeface="Amiri" pitchFamily="2" charset="-78"/>
                 <a:cs typeface="Amiri" pitchFamily="2" charset="-78"/>
               </a:rPr>
               <a:t>جِنْسِيَّاتٌ</a:t>
@@ -34364,6 +34590,7 @@
                   <a:srgbClr val="1B3B6F"/>
                 </a:solidFill>
                 <a:latin typeface="Amiri" pitchFamily="2" charset="-78"/>
+                <a:ea typeface="Amiri" pitchFamily="2" charset="-78"/>
                 <a:cs typeface="Amiri" pitchFamily="2" charset="-78"/>
               </a:rPr>
               <a:t>مِصْرِيٌّ</a:t>
@@ -34521,6 +34748,7 @@
                   <a:srgbClr val="1B3B6F"/>
                 </a:solidFill>
                 <a:latin typeface="Amiri" pitchFamily="2" charset="-78"/>
+                <a:ea typeface="Amiri" pitchFamily="2" charset="-78"/>
                 <a:cs typeface="Amiri" pitchFamily="2" charset="-78"/>
               </a:rPr>
               <a:t>مِصْرِيُّونَ</a:t>
@@ -34624,6 +34852,7 @@
                   <a:srgbClr val="1B3B6F"/>
                 </a:solidFill>
                 <a:latin typeface="Amiri" pitchFamily="2" charset="-78"/>
+                <a:ea typeface="Amiri" pitchFamily="2" charset="-78"/>
                 <a:cs typeface="Amiri" pitchFamily="2" charset="-78"/>
               </a:rPr>
               <a:t>مِصْرِيَّةٌ</a:t>
@@ -34889,6 +35118,7 @@
                   <a:srgbClr val="1B3B6F"/>
                 </a:solidFill>
                 <a:latin typeface="Amiri" pitchFamily="2" charset="-78"/>
+                <a:ea typeface="Amiri" pitchFamily="2" charset="-78"/>
                 <a:cs typeface="Amiri" pitchFamily="2" charset="-78"/>
               </a:rPr>
               <a:t>بَرِيطَانِيٌّ</a:t>
@@ -35046,6 +35276,7 @@
                   <a:srgbClr val="1B3B6F"/>
                 </a:solidFill>
                 <a:latin typeface="Amiri" pitchFamily="2" charset="-78"/>
+                <a:ea typeface="Amiri" pitchFamily="2" charset="-78"/>
                 <a:cs typeface="Amiri" pitchFamily="2" charset="-78"/>
               </a:rPr>
               <a:t>بَرِيطَانِيُّونَ</a:t>
@@ -35149,6 +35380,7 @@
                   <a:srgbClr val="1B3B6F"/>
                 </a:solidFill>
                 <a:latin typeface="Amiri" pitchFamily="2" charset="-78"/>
+                <a:ea typeface="Amiri" pitchFamily="2" charset="-78"/>
                 <a:cs typeface="Amiri" pitchFamily="2" charset="-78"/>
               </a:rPr>
               <a:t>بَرِيطَانِيَّةٌ</a:t>
@@ -35414,6 +35646,7 @@
                   <a:srgbClr val="1B3B6F"/>
                 </a:solidFill>
                 <a:latin typeface="Amiri" pitchFamily="2" charset="-78"/>
+                <a:ea typeface="Amiri" pitchFamily="2" charset="-78"/>
                 <a:cs typeface="Amiri" pitchFamily="2" charset="-78"/>
               </a:rPr>
               <a:t>مَغْرِبِيٌّ</a:t>
@@ -35571,6 +35804,7 @@
                   <a:srgbClr val="1B3B6F"/>
                 </a:solidFill>
                 <a:latin typeface="Amiri" pitchFamily="2" charset="-78"/>
+                <a:ea typeface="Amiri" pitchFamily="2" charset="-78"/>
                 <a:cs typeface="Amiri" pitchFamily="2" charset="-78"/>
               </a:rPr>
               <a:t>مَغَارِبَةٌ</a:t>
@@ -35674,6 +35908,7 @@
                   <a:srgbClr val="1B3B6F"/>
                 </a:solidFill>
                 <a:latin typeface="Amiri" pitchFamily="2" charset="-78"/>
+                <a:ea typeface="Amiri" pitchFamily="2" charset="-78"/>
                 <a:cs typeface="Amiri" pitchFamily="2" charset="-78"/>
               </a:rPr>
               <a:t>مَغْرِبِيَّةٌ</a:t>
@@ -35939,6 +36174,7 @@
                   <a:srgbClr val="1B3B6F"/>
                 </a:solidFill>
                 <a:latin typeface="Amiri" pitchFamily="2" charset="-78"/>
+                <a:ea typeface="Amiri" pitchFamily="2" charset="-78"/>
                 <a:cs typeface="Amiri" pitchFamily="2" charset="-78"/>
               </a:rPr>
               <a:t>لُغَةٌ</a:t>
@@ -36096,6 +36332,7 @@
                   <a:srgbClr val="1B3B6F"/>
                 </a:solidFill>
                 <a:latin typeface="Amiri" pitchFamily="2" charset="-78"/>
+                <a:ea typeface="Amiri" pitchFamily="2" charset="-78"/>
                 <a:cs typeface="Amiri" pitchFamily="2" charset="-78"/>
               </a:rPr>
               <a:t>اللُّغَةُ الأُمُّ</a:t>
@@ -36199,6 +36436,7 @@
                   <a:srgbClr val="1B3B6F"/>
                 </a:solidFill>
                 <a:latin typeface="Amiri" pitchFamily="2" charset="-78"/>
+                <a:ea typeface="Amiri" pitchFamily="2" charset="-78"/>
                 <a:cs typeface="Amiri" pitchFamily="2" charset="-78"/>
               </a:rPr>
               <a:t>لُغَاتٌ</a:t>
@@ -36332,6 +36570,7 @@
                   <a:srgbClr val="D4AF37"/>
                 </a:solidFill>
                 <a:latin typeface="Amiri" pitchFamily="2" charset="-78"/>
+                <a:ea typeface="Amiri" pitchFamily="2" charset="-78"/>
                 <a:cs typeface="Amiri" pitchFamily="2" charset="-78"/>
               </a:rPr>
               <a:t>م</a:t>
@@ -36652,6 +36891,7 @@
                   <a:srgbClr val="8A6D1E"/>
                 </a:solidFill>
                 <a:latin typeface="Amiri" pitchFamily="2" charset="-78"/>
+                <a:ea typeface="Amiri" pitchFamily="2" charset="-78"/>
                 <a:cs typeface="Amiri" pitchFamily="2" charset="-78"/>
               </a:rPr>
               <a:t>المَوْقِعُ وَاللُّغَاتُ</a:t>
@@ -36955,6 +37195,7 @@
                   <a:srgbClr val="1B3B6F"/>
                 </a:solidFill>
                 <a:latin typeface="Amiri" pitchFamily="2" charset="-78"/>
+                <a:ea typeface="Amiri" pitchFamily="2" charset="-78"/>
                 <a:cs typeface="Amiri" pitchFamily="2" charset="-78"/>
               </a:rPr>
               <a:t>العَرَبِيَّةُ · الإِنْجْلِيزِيَّةُ</a:t>
@@ -37112,6 +37353,7 @@
                   <a:srgbClr val="1B3B6F"/>
                 </a:solidFill>
                 <a:latin typeface="Amiri" pitchFamily="2" charset="-78"/>
+                <a:ea typeface="Amiri" pitchFamily="2" charset="-78"/>
                 <a:cs typeface="Amiri" pitchFamily="2" charset="-78"/>
               </a:rPr>
               <a:t>الإِسْبَانِيَّةُ</a:t>
@@ -37215,6 +37457,7 @@
                   <a:srgbClr val="1B3B6F"/>
                 </a:solidFill>
                 <a:latin typeface="Amiri" pitchFamily="2" charset="-78"/>
+                <a:ea typeface="Amiri" pitchFamily="2" charset="-78"/>
                 <a:cs typeface="Amiri" pitchFamily="2" charset="-78"/>
               </a:rPr>
               <a:t>الفَرَنْسِيَّةُ</a:t>
@@ -37480,6 +37723,7 @@
                   <a:srgbClr val="1B3B6F"/>
                 </a:solidFill>
                 <a:latin typeface="Amiri" pitchFamily="2" charset="-78"/>
+                <a:ea typeface="Amiri" pitchFamily="2" charset="-78"/>
                 <a:cs typeface="Amiri" pitchFamily="2" charset="-78"/>
               </a:rPr>
               <a:t>وُلِدْتُ فِي …</a:t>
@@ -37637,6 +37881,7 @@
                   <a:srgbClr val="1B3B6F"/>
                 </a:solidFill>
                 <a:latin typeface="Amiri" pitchFamily="2" charset="-78"/>
+                <a:ea typeface="Amiri" pitchFamily="2" charset="-78"/>
                 <a:cs typeface="Amiri" pitchFamily="2" charset="-78"/>
               </a:rPr>
               <a:t>نَشَأْتُ</a:t>
@@ -37740,6 +37985,7 @@
                   <a:srgbClr val="1B3B6F"/>
                 </a:solidFill>
                 <a:latin typeface="Amiri" pitchFamily="2" charset="-78"/>
+                <a:ea typeface="Amiri" pitchFamily="2" charset="-78"/>
                 <a:cs typeface="Amiri" pitchFamily="2" charset="-78"/>
               </a:rPr>
               <a:t>وُلِدَتْ</a:t>
@@ -38005,6 +38251,7 @@
                   <a:srgbClr val="1B3B6F"/>
                 </a:solidFill>
                 <a:latin typeface="Amiri" pitchFamily="2" charset="-78"/>
+                <a:ea typeface="Amiri" pitchFamily="2" charset="-78"/>
                 <a:cs typeface="Amiri" pitchFamily="2" charset="-78"/>
               </a:rPr>
               <a:t>أَصْلِي مِنْ …</a:t>
@@ -38162,6 +38409,7 @@
                   <a:srgbClr val="1B3B6F"/>
                 </a:solidFill>
                 <a:latin typeface="Amiri" pitchFamily="2" charset="-78"/>
+                <a:ea typeface="Amiri" pitchFamily="2" charset="-78"/>
                 <a:cs typeface="Amiri" pitchFamily="2" charset="-78"/>
               </a:rPr>
               <a:t>جُذُورٌ</a:t>
@@ -38265,6 +38513,7 @@
                   <a:srgbClr val="1B3B6F"/>
                 </a:solidFill>
                 <a:latin typeface="Amiri" pitchFamily="2" charset="-78"/>
+                <a:ea typeface="Amiri" pitchFamily="2" charset="-78"/>
                 <a:cs typeface="Amiri" pitchFamily="2" charset="-78"/>
               </a:rPr>
               <a:t>أَصْلُ أُسْرَتِي</a:t>
@@ -38530,6 +38779,7 @@
                   <a:srgbClr val="1B3B6F"/>
                 </a:solidFill>
                 <a:latin typeface="Amiri" pitchFamily="2" charset="-78"/>
+                <a:ea typeface="Amiri" pitchFamily="2" charset="-78"/>
                 <a:cs typeface="Amiri" pitchFamily="2" charset="-78"/>
               </a:rPr>
               <a:t>يَقَعُ · تَقَعُ فِي …</a:t>
@@ -38687,6 +38937,7 @@
                   <a:srgbClr val="1B3B6F"/>
                 </a:solidFill>
                 <a:latin typeface="Amiri" pitchFamily="2" charset="-78"/>
+                <a:ea typeface="Amiri" pitchFamily="2" charset="-78"/>
                 <a:cs typeface="Amiri" pitchFamily="2" charset="-78"/>
               </a:rPr>
               <a:t>بَيْنَ</a:t>
@@ -38790,6 +39041,7 @@
                   <a:srgbClr val="1B3B6F"/>
                 </a:solidFill>
                 <a:latin typeface="Amiri" pitchFamily="2" charset="-78"/>
+                <a:ea typeface="Amiri" pitchFamily="2" charset="-78"/>
                 <a:cs typeface="Amiri" pitchFamily="2" charset="-78"/>
               </a:rPr>
               <a:t>فِي شَمَالِ</a:t>
@@ -39055,6 +39307,7 @@
                   <a:srgbClr val="1B3B6F"/>
                 </a:solidFill>
                 <a:latin typeface="Amiri" pitchFamily="2" charset="-78"/>
+                <a:ea typeface="Amiri" pitchFamily="2" charset="-78"/>
                 <a:cs typeface="Amiri" pitchFamily="2" charset="-78"/>
               </a:rPr>
               <a:t>أَتَكَلَّمُ بِطَلَاقَةٍ</a:t>
@@ -39212,6 +39465,7 @@
                   <a:srgbClr val="1B3B6F"/>
                 </a:solidFill>
                 <a:latin typeface="Amiri" pitchFamily="2" charset="-78"/>
+                <a:ea typeface="Amiri" pitchFamily="2" charset="-78"/>
                 <a:cs typeface="Amiri" pitchFamily="2" charset="-78"/>
               </a:rPr>
               <a:t>أَفْهَمُ</a:t>
@@ -39315,6 +39569,7 @@
                   <a:srgbClr val="1B3B6F"/>
                 </a:solidFill>
                 <a:latin typeface="Amiri" pitchFamily="2" charset="-78"/>
+                <a:ea typeface="Amiri" pitchFamily="2" charset="-78"/>
                 <a:cs typeface="Amiri" pitchFamily="2" charset="-78"/>
               </a:rPr>
               <a:t>قَلِيلًا</a:t>
@@ -39580,6 +39835,7 @@
                   <a:srgbClr val="1B3B6F"/>
                 </a:solidFill>
                 <a:latin typeface="Amiri" pitchFamily="2" charset="-78"/>
+                <a:ea typeface="Amiri" pitchFamily="2" charset="-78"/>
                 <a:cs typeface="Amiri" pitchFamily="2" charset="-78"/>
               </a:rPr>
               <a:t>قَارَّةٌ</a:t>
@@ -39737,6 +39993,7 @@
                   <a:srgbClr val="1B3B6F"/>
                 </a:solidFill>
                 <a:latin typeface="Amiri" pitchFamily="2" charset="-78"/>
+                <a:ea typeface="Amiri" pitchFamily="2" charset="-78"/>
                 <a:cs typeface="Amiri" pitchFamily="2" charset="-78"/>
               </a:rPr>
               <a:t>إِفْرِيقْيَا · آسْيَا</a:t>
@@ -39840,6 +40097,7 @@
                   <a:srgbClr val="1B3B6F"/>
                 </a:solidFill>
                 <a:latin typeface="Amiri" pitchFamily="2" charset="-78"/>
+                <a:ea typeface="Amiri" pitchFamily="2" charset="-78"/>
                 <a:cs typeface="Amiri" pitchFamily="2" charset="-78"/>
               </a:rPr>
               <a:t>قَارَّاتٌ</a:t>
@@ -39973,6 +40231,7 @@
                   <a:srgbClr val="D4AF37"/>
                 </a:solidFill>
                 <a:latin typeface="Amiri" pitchFamily="2" charset="-78"/>
+                <a:ea typeface="Amiri" pitchFamily="2" charset="-78"/>
                 <a:cs typeface="Amiri" pitchFamily="2" charset="-78"/>
               </a:rPr>
               <a:t>م</a:t>
@@ -40293,6 +40552,7 @@
                   <a:srgbClr val="8A6D1E"/>
                 </a:solidFill>
                 <a:latin typeface="Amiri" pitchFamily="2" charset="-78"/>
+                <a:ea typeface="Amiri" pitchFamily="2" charset="-78"/>
                 <a:cs typeface="Amiri" pitchFamily="2" charset="-78"/>
               </a:rPr>
               <a:t>فِي الغُرَفِ</a:t>
@@ -41469,6 +41729,7 @@
                   <a:srgbClr val="1B3B6F"/>
                 </a:solidFill>
                 <a:latin typeface="Amiri" pitchFamily="2" charset="-78"/>
+                <a:ea typeface="Amiri" pitchFamily="2" charset="-78"/>
                 <a:cs typeface="Amiri" pitchFamily="2" charset="-78"/>
               </a:rPr>
               <a:t>دَوْرُكَ!</a:t>
@@ -41545,6 +41806,7 @@
                   <a:srgbClr val="1B3B6F"/>
                 </a:solidFill>
                 <a:latin typeface="Amiri" pitchFamily="2" charset="-78"/>
+                <a:ea typeface="Amiri" pitchFamily="2" charset="-78"/>
                 <a:cs typeface="Amiri" pitchFamily="2" charset="-78"/>
               </a:rPr>
               <a:t>أَحْسَنْتَ! / أَحْسَنْتِ!</a:t>
@@ -41621,6 +41883,7 @@
                   <a:srgbClr val="1B3B6F"/>
                 </a:solidFill>
                 <a:latin typeface="Amiri" pitchFamily="2" charset="-78"/>
+                <a:ea typeface="Amiri" pitchFamily="2" charset="-78"/>
                 <a:cs typeface="Amiri" pitchFamily="2" charset="-78"/>
               </a:rPr>
               <a:t>تَكَلَّمْ أَكْثَرَ، مِنْ فَضْلِكَ</a:t>
@@ -41697,6 +41960,7 @@
                   <a:srgbClr val="1B3B6F"/>
                 </a:solidFill>
                 <a:latin typeface="Amiri" pitchFamily="2" charset="-78"/>
+                <a:ea typeface="Amiri" pitchFamily="2" charset="-78"/>
                 <a:cs typeface="Amiri" pitchFamily="2" charset="-78"/>
               </a:rPr>
               <a:t>لِمَاذَا؟</a:t>
@@ -41868,6 +42132,7 @@
                   <a:srgbClr val="D4AF37"/>
                 </a:solidFill>
                 <a:latin typeface="Amiri" pitchFamily="2" charset="-78"/>
+                <a:ea typeface="Amiri" pitchFamily="2" charset="-78"/>
                 <a:cs typeface="Amiri" pitchFamily="2" charset="-78"/>
               </a:rPr>
               <a:t>م</a:t>
@@ -42188,6 +42453,7 @@
                   <a:srgbClr val="8A6D1E"/>
                 </a:solidFill>
                 <a:latin typeface="Amiri" pitchFamily="2" charset="-78"/>
+                <a:ea typeface="Amiri" pitchFamily="2" charset="-78"/>
                 <a:cs typeface="Amiri" pitchFamily="2" charset="-78"/>
               </a:rPr>
               <a:t>فِي مُخَيَّمٍ دُوَلِيٍّ</a:t>
@@ -42468,6 +42734,7 @@
                   <a:srgbClr val="1B3B6F"/>
                 </a:solidFill>
                 <a:latin typeface="Amiri" pitchFamily="2" charset="-78"/>
+                <a:ea typeface="Amiri" pitchFamily="2" charset="-78"/>
                 <a:cs typeface="Amiri" pitchFamily="2" charset="-78"/>
               </a:rPr>
               <a:t>اسْمِي … وَأَنَا مِنْ …</a:t>
@@ -42544,6 +42811,7 @@
                   <a:srgbClr val="1B3B6F"/>
                 </a:solidFill>
                 <a:latin typeface="Amiri" pitchFamily="2" charset="-78"/>
+                <a:ea typeface="Amiri" pitchFamily="2" charset="-78"/>
                 <a:cs typeface="Amiri" pitchFamily="2" charset="-78"/>
               </a:rPr>
               <a:t>أَهْلًا وَسَهْلًا! مَا اسْمُكَ؟ وَمِنْ أَيْنَ أَنْتَ؟</a:t>
@@ -42712,6 +42980,7 @@
                   <a:srgbClr val="5A6472"/>
                 </a:solidFill>
                 <a:latin typeface="Amiri" pitchFamily="2" charset="-78"/>
+                <a:ea typeface="Amiri" pitchFamily="2" charset="-78"/>
                 <a:cs typeface="Amiri" pitchFamily="2" charset="-78"/>
               </a:rPr>
               <a:t>أَنَا</a:t>
@@ -42801,6 +43070,7 @@
                   <a:srgbClr val="1B3B6F"/>
                 </a:solidFill>
                 <a:latin typeface="Amiri" pitchFamily="2" charset="-78"/>
+                <a:ea typeface="Amiri" pitchFamily="2" charset="-78"/>
                 <a:cs typeface="Amiri" pitchFamily="2" charset="-78"/>
               </a:rPr>
               <a:t>مَا جِنْسِيَّتُكَ؟</a:t>
@@ -42969,6 +43239,7 @@
                   <a:srgbClr val="1B3B6F"/>
                 </a:solidFill>
                 <a:latin typeface="Amiri" pitchFamily="2" charset="-78"/>
+                <a:ea typeface="Amiri" pitchFamily="2" charset="-78"/>
                 <a:cs typeface="Amiri" pitchFamily="2" charset="-78"/>
               </a:rPr>
               <a:t>أَتَكَلَّمُ … وَ…</a:t>
@@ -43045,6 +43316,7 @@
                   <a:srgbClr val="1B3B6F"/>
                 </a:solidFill>
                 <a:latin typeface="Amiri" pitchFamily="2" charset="-78"/>
+                <a:ea typeface="Amiri" pitchFamily="2" charset="-78"/>
                 <a:cs typeface="Amiri" pitchFamily="2" charset="-78"/>
               </a:rPr>
               <a:t>مَا اللُّغَاتُ الَّتِي تَتَكَلَّمُهَا؟</a:t>
@@ -43213,6 +43485,7 @@
                   <a:srgbClr val="1B3B6F"/>
                 </a:solidFill>
                 <a:latin typeface="Amiri" pitchFamily="2" charset="-78"/>
+                <a:ea typeface="Amiri" pitchFamily="2" charset="-78"/>
                 <a:cs typeface="Amiri" pitchFamily="2" charset="-78"/>
               </a:rPr>
               <a:t>مِنْ أَيْنَ …؟</a:t>
@@ -43289,6 +43562,7 @@
                   <a:srgbClr val="1B3B6F"/>
                 </a:solidFill>
                 <a:latin typeface="Amiri" pitchFamily="2" charset="-78"/>
+                <a:ea typeface="Amiri" pitchFamily="2" charset="-78"/>
                 <a:cs typeface="Amiri" pitchFamily="2" charset="-78"/>
               </a:rPr>
               <a:t>مُمْتَازٌ. عِنْدَنَا طُلَّابٌ مِنْ عِشْرِينَ بَلَدًا.</a:t>
@@ -43457,6 +43731,7 @@
                   <a:srgbClr val="1B3B6F"/>
                 </a:solidFill>
                 <a:latin typeface="Amiri" pitchFamily="2" charset="-78"/>
+                <a:ea typeface="Amiri" pitchFamily="2" charset="-78"/>
                 <a:cs typeface="Amiri" pitchFamily="2" charset="-78"/>
               </a:rPr>
               <a:t>يَقَعُ المَغْرِبُ فِي …</a:t>
@@ -43533,6 +43808,7 @@
                   <a:srgbClr val="1B3B6F"/>
                 </a:solidFill>
                 <a:latin typeface="Amiri" pitchFamily="2" charset="-78"/>
+                <a:ea typeface="Amiri" pitchFamily="2" charset="-78"/>
                 <a:cs typeface="Amiri" pitchFamily="2" charset="-78"/>
               </a:rPr>
               <a:t>مِنْ فَرَنْسَا وَمِصْرَ. أَيْنَ يَقَعُ المَغْرِبُ؟</a:t>
@@ -43807,6 +44083,7 @@
                   <a:srgbClr val="D4AF37"/>
                 </a:solidFill>
                 <a:latin typeface="Amiri" pitchFamily="2" charset="-78"/>
+                <a:ea typeface="Amiri" pitchFamily="2" charset="-78"/>
                 <a:cs typeface="Amiri" pitchFamily="2" charset="-78"/>
               </a:rPr>
               <a:t>م</a:t>
@@ -44127,6 +44404,7 @@
                   <a:srgbClr val="8A6D1E"/>
                 </a:solidFill>
                 <a:latin typeface="Amiri" pitchFamily="2" charset="-78"/>
+                <a:ea typeface="Amiri" pitchFamily="2" charset="-78"/>
                 <a:cs typeface="Amiri" pitchFamily="2" charset="-78"/>
               </a:rPr>
               <a:t>زَمِيلٌ جَدِيدٌ مِنَ الخَارِجِ</a:t>
@@ -44407,6 +44685,7 @@
                   <a:srgbClr val="1B3B6F"/>
                 </a:solidFill>
                 <a:latin typeface="Amiri" pitchFamily="2" charset="-78"/>
+                <a:ea typeface="Amiri" pitchFamily="2" charset="-78"/>
                 <a:cs typeface="Amiri" pitchFamily="2" charset="-78"/>
               </a:rPr>
               <a:t>أَنَا … لٰكِنَّ أَصْلَ أُسْرَتِي مِنْ …</a:t>
@@ -44483,6 +44762,7 @@
                   <a:srgbClr val="1B3B6F"/>
                 </a:solidFill>
                 <a:latin typeface="Amiri" pitchFamily="2" charset="-78"/>
+                <a:ea typeface="Amiri" pitchFamily="2" charset="-78"/>
                 <a:cs typeface="Amiri" pitchFamily="2" charset="-78"/>
               </a:rPr>
               <a:t>مَرْحَبًا، أَنَا جَدِيدٌ هُنَا. هَلْ أَنْتَ إِنْجْلِيزِيٌّ؟</a:t>
@@ -44651,6 +44931,7 @@
                   <a:srgbClr val="1B3B6F"/>
                 </a:solidFill>
                 <a:latin typeface="Amiri" pitchFamily="2" charset="-78"/>
+                <a:ea typeface="Amiri" pitchFamily="2" charset="-78"/>
                 <a:cs typeface="Amiri" pitchFamily="2" charset="-78"/>
               </a:rPr>
               <a:t>تَقَعُ … فِي … جَنُوبَ …</a:t>
@@ -44727,6 +45008,7 @@
                   <a:srgbClr val="1B3B6F"/>
                 </a:solidFill>
                 <a:latin typeface="Amiri" pitchFamily="2" charset="-78"/>
+                <a:ea typeface="Amiri" pitchFamily="2" charset="-78"/>
                 <a:cs typeface="Amiri" pitchFamily="2" charset="-78"/>
               </a:rPr>
               <a:t>أَيْنَ تَقَعُ السُّودَانُ؟</a:t>
@@ -44895,6 +45177,7 @@
                   <a:srgbClr val="1B3B6F"/>
                 </a:solidFill>
                 <a:latin typeface="Amiri" pitchFamily="2" charset="-78"/>
+                <a:ea typeface="Amiri" pitchFamily="2" charset="-78"/>
                 <a:cs typeface="Amiri" pitchFamily="2" charset="-78"/>
               </a:rPr>
               <a:t>أَتَكَلَّمُ … مَعَ … وَ… مَعَ …</a:t>
@@ -44971,6 +45254,7 @@
                   <a:srgbClr val="1B3B6F"/>
                 </a:solidFill>
                 <a:latin typeface="Amiri" pitchFamily="2" charset="-78"/>
+                <a:ea typeface="Amiri" pitchFamily="2" charset="-78"/>
                 <a:cs typeface="Amiri" pitchFamily="2" charset="-78"/>
               </a:rPr>
               <a:t>مَا اللُّغَةُ الَّتِي تَتَكَلَّمُهَا فِي البَيْتِ؟</a:t>
@@ -45074,6 +45358,7 @@
                   <a:srgbClr val="1B3B6F"/>
                 </a:solidFill>
                 <a:latin typeface="Amiri" pitchFamily="2" charset="-78"/>
+                <a:ea typeface="Amiri" pitchFamily="2" charset="-78"/>
                 <a:cs typeface="Amiri" pitchFamily="2" charset="-78"/>
               </a:rPr>
               <a:t>مَا عَاصِمَةُ …؟ وَهَلْ …؟</a:t>
@@ -45150,6 +45435,7 @@
                   <a:srgbClr val="1B3B6F"/>
                 </a:solidFill>
                 <a:latin typeface="Amiri" pitchFamily="2" charset="-78"/>
+                <a:ea typeface="Amiri" pitchFamily="2" charset="-78"/>
                 <a:cs typeface="Amiri" pitchFamily="2" charset="-78"/>
               </a:rPr>
               <a:t>أَنَا مِنْ إِيطَالْيَا.</a:t>
@@ -45253,6 +45539,7 @@
                   <a:srgbClr val="1B3B6F"/>
                 </a:solidFill>
                 <a:latin typeface="Amiri" pitchFamily="2" charset="-78"/>
+                <a:ea typeface="Amiri" pitchFamily="2" charset="-78"/>
                 <a:cs typeface="Amiri" pitchFamily="2" charset="-78"/>
               </a:rPr>
               <a:t>أُرِيدُ أَنْ أَزُورَ … لِأَنَّ …</a:t>
@@ -45329,6 +45616,7 @@
                   <a:srgbClr val="1B3B6F"/>
                 </a:solidFill>
                 <a:latin typeface="Amiri" pitchFamily="2" charset="-78"/>
+                <a:ea typeface="Amiri" pitchFamily="2" charset="-78"/>
                 <a:cs typeface="Amiri" pitchFamily="2" charset="-78"/>
               </a:rPr>
               <a:t>رُومَا. أَيُّ بَلَدٍ تُرِيدُ أَنْ تَزُورَ؟</a:t>
@@ -45503,13 +45791,9 @@
     <a:fontScheme name="Office">
       <a:majorFont>
         <a:latin typeface="Calibri Light" panose="020F0302020204030204"/>
-        <a:ea typeface=""/>
-        <a:cs typeface=""/>
-        <a:font script="Jpan" typeface="游ゴシック Light"/>
-        <a:font script="Hang" typeface="맑은 고딕"/>
-        <a:font script="Hans" typeface="等线 Light"/>
-        <a:font script="Hant" typeface="新細明體"/>
-        <a:font script="Arab" typeface="Times New Roman"/>
+        <a:ea typeface="Amiri" pitchFamily="2" charset="-78"/>
+        <a:cs typeface="Amiri" pitchFamily="2" charset="-78"/>
+        <a:font script="Arab" typeface="Amiri"/>
         <a:font script="Hebr" typeface="Times New Roman"/>
         <a:font script="Thai" typeface="Angsana New"/>
         <a:font script="Ethi" typeface="Nyala"/>
@@ -45555,13 +45839,9 @@
       </a:majorFont>
       <a:minorFont>
         <a:latin typeface="Calibri" panose="020F0502020204030204"/>
-        <a:ea typeface=""/>
-        <a:cs typeface=""/>
-        <a:font script="Jpan" typeface="游ゴシック"/>
-        <a:font script="Hang" typeface="맑은 고딕"/>
-        <a:font script="Hans" typeface="等线"/>
-        <a:font script="Hant" typeface="新細明體"/>
-        <a:font script="Arab" typeface="Arial"/>
+        <a:ea typeface="Amiri" pitchFamily="2" charset="-78"/>
+        <a:cs typeface="Amiri" pitchFamily="2" charset="-78"/>
+        <a:font script="Arab" typeface="Amiri"/>
         <a:font script="Hebr" typeface="Arial"/>
         <a:font script="Thai" typeface="Cordia New"/>
         <a:font script="Ethi" typeface="Nyala"/>
